--- a/00-01_han-ai/training-materials/course03_jissen_gazo.pptx
+++ b/00-01_han-ai/training-materials/course03_jissen_gazo.pptx
@@ -4002,14 +4002,63 @@
           </a:bodyPr>
           <a:lstStyle/>
           <a:p>
-            <a:pPr algn="l"/>
             <a:r>
               <a:rPr sz="1300" b="0" i="1">
                 <a:solidFill>
                   <a:srgbClr val="64748B"/>
                 </a:solidFill>
               </a:rPr>
-              <a:t>例：「水彩画風で春の桜と笑顔のスタッフの画像、SNS投稿向け、明るく温かみのある印象で」</a:t>
+              <a:t>例①：「水彩画風で春の桜と笑顔のスタッフの画像、SNS投稿向け、明るく温かみのある印象で」</a:t>
+            </a:r>
+          </a:p>
+          <a:p>
+            <a:r>
+              <a:rPr sz="1300" b="0" i="1">
+                <a:solidFill>
+                  <a:srgbClr val="64748B"/>
+                </a:solidFill>
+              </a:rPr>
+              <a:t>例②：「シンプルなイラスト風で夏のキャンペーン商品の画像、チラシ向け、爽やかで目を引く印象で」</a:t>
+            </a:r>
+          </a:p>
+          <a:p>
+            <a:r>
+              <a:rPr sz="1300" b="0" i="1">
+                <a:solidFill>
+                  <a:srgbClr val="64748B"/>
+                </a:solidFill>
+              </a:rPr>
+              <a:t>例③：「写真リアル調で清潔感のあるオフィス環境の画像、会社HP向け、信頼感があり落ち着いた印象で」</a:t>
+            </a:r>
+          </a:p>
+          <a:p>
+            <a:r>
+              <a:rPr sz="1300" b="0" i="1">
+                <a:solidFill>
+                  <a:srgbClr val="64748B"/>
+                </a:solidFill>
+              </a:rPr>
+              <a:t>例④：「和風テイストで旬の野菜と木のテーブルの画像、SNS投稿向け、手作り感のある温かみのある印象で」</a:t>
+            </a:r>
+          </a:p>
+          <a:p>
+            <a:r>
+              <a:rPr sz="1300" b="0" i="1">
+                <a:solidFill>
+                  <a:srgbClr val="64748B"/>
+                </a:solidFill>
+              </a:rPr>
+              <a:t/>
+            </a:r>
+          </a:p>
+          <a:p>
+            <a:r>
+              <a:rPr sz="1300" b="0" i="1">
+                <a:solidFill>
+                  <a:srgbClr val="64748B"/>
+                </a:solidFill>
+              </a:rPr>
+              <a:t>【ダウンロード手順】 画像を選択 → 右上の共有ボタン → ダウンロード → PNG → ダウンロード</a:t>
             </a:r>
           </a:p>
         </p:txBody>
@@ -4548,7 +4597,7 @@
                   <a:srgbClr val="BFDBFE"/>
                 </a:solidFill>
               </a:rPr>
-              <a:t>テンプレート＋AI画像を組み合わせて仕上げる</a:t>
+              <a:t>Magic Designでレイアウト自動生成 → AI画像差し込み → チェックリストで仕上げ</a:t>
             </a:r>
           </a:p>
         </p:txBody>
@@ -4643,7 +4692,7 @@
                   <a:srgbClr val="FFFFFF"/>
                 </a:solidFill>
               </a:rPr>
-              <a:t>チラシ作成 — セクション2・3の技術を組み合わせる</a:t>
+              <a:t>チラシ作成 — Magic Design → AI画像差し込み → 完成度チェック</a:t>
             </a:r>
           </a:p>
         </p:txBody>
@@ -5103,7 +5152,196 @@
           </a:bodyPr>
           <a:lstStyle/>
           <a:p>
-            <a:pPr algn="l"/>
+            <a:r>
+              <a:rPr sz="1300" b="0" i="1">
+                <a:solidFill>
+                  <a:srgbClr val="64748B"/>
+                </a:solidFill>
+              </a:rPr>
+              <a:t>【Magic Design手順】</a:t>
+            </a:r>
+          </a:p>
+          <a:p>
+            <a:r>
+              <a:rPr sz="1300" b="0" i="1">
+                <a:solidFill>
+                  <a:srgbClr val="64748B"/>
+                </a:solidFill>
+              </a:rPr>
+              <a:t>Canvaトップ →「チラシ」と検索 → Magic Designを使う → 業種・雰囲気を日本語で入力</a:t>
+            </a:r>
+          </a:p>
+          <a:p>
+            <a:r>
+              <a:rPr sz="1300" b="0" i="1">
+                <a:solidFill>
+                  <a:srgbClr val="64748B"/>
+                </a:solidFill>
+              </a:rPr>
+              <a:t>入力例：整体院の春キャンペーン ／ 洋食ランチメニュー ／ 農家の野菜直売 ／ 美容室の新メニュー ／ 税理士の確定申告案内</a:t>
+            </a:r>
+          </a:p>
+          <a:p>
+            <a:r>
+              <a:rPr sz="1300" b="0" i="1">
+                <a:solidFill>
+                  <a:srgbClr val="64748B"/>
+                </a:solidFill>
+              </a:rPr>
+              <a:t/>
+            </a:r>
+          </a:p>
+          <a:p>
+            <a:r>
+              <a:rPr sz="1300" b="0" i="1">
+                <a:solidFill>
+                  <a:srgbClr val="64748B"/>
+                </a:solidFill>
+              </a:rPr>
+              <a:t>【AI画像の差し込み】</a:t>
+            </a:r>
+          </a:p>
+          <a:p>
+            <a:r>
+              <a:rPr sz="1300" b="0" i="1">
+                <a:solidFill>
+                  <a:srgbClr val="64748B"/>
+                </a:solidFill>
+              </a:rPr>
+              <a:t>左パネル → アップロード → ダウンロード済みのAI画像を選択 → ドラッグして配置</a:t>
+            </a:r>
+          </a:p>
+          <a:p>
+            <a:r>
+              <a:rPr sz="1300" b="0" i="1">
+                <a:solidFill>
+                  <a:srgbClr val="64748B"/>
+                </a:solidFill>
+              </a:rPr>
+              <a:t/>
+            </a:r>
+          </a:p>
+          <a:p>
+            <a:r>
+              <a:rPr sz="1300" b="0" i="1">
+                <a:solidFill>
+                  <a:srgbClr val="64748B"/>
+                </a:solidFill>
+              </a:rPr>
+              <a:t>【完成度チェック ▼ まずやること】</a:t>
+            </a:r>
+          </a:p>
+          <a:p>
+            <a:r>
+              <a:rPr sz="1300" b="0" i="1">
+                <a:solidFill>
+                  <a:srgbClr val="64748B"/>
+                </a:solidFill>
+              </a:rPr>
+              <a:t>□ テキストを全て自社の情報に書き換えた</a:t>
+            </a:r>
+          </a:p>
+          <a:p>
+            <a:r>
+              <a:rPr sz="1300" b="0" i="1">
+                <a:solidFill>
+                  <a:srgbClr val="64748B"/>
+                </a:solidFill>
+              </a:rPr>
+              <a:t>□ キャッチコピーを自社らしい言葉に変えた</a:t>
+            </a:r>
+          </a:p>
+          <a:p>
+            <a:r>
+              <a:rPr sz="1300" b="0" i="1">
+                <a:solidFill>
+                  <a:srgbClr val="64748B"/>
+                </a:solidFill>
+              </a:rPr>
+              <a:t>□ 住所・電話番号・営業時間を入れた</a:t>
+            </a:r>
+          </a:p>
+          <a:p>
+            <a:r>
+              <a:rPr sz="1300" b="0" i="1">
+                <a:solidFill>
+                  <a:srgbClr val="64748B"/>
+                </a:solidFill>
+              </a:rPr>
+              <a:t>□ 不要な要素・余分な文字を削除した</a:t>
+            </a:r>
+          </a:p>
+          <a:p>
+            <a:r>
+              <a:rPr sz="1300" b="0" i="1">
+                <a:solidFill>
+                  <a:srgbClr val="64748B"/>
+                </a:solidFill>
+              </a:rPr>
+              <a:t/>
+            </a:r>
+          </a:p>
+          <a:p>
+            <a:r>
+              <a:rPr sz="1300" b="0" i="1">
+                <a:solidFill>
+                  <a:srgbClr val="64748B"/>
+                </a:solidFill>
+              </a:rPr>
+              <a:t>【完成度チェック ▼ 余裕があれば】</a:t>
+            </a:r>
+          </a:p>
+          <a:p>
+            <a:r>
+              <a:rPr sz="1300" b="0" i="1">
+                <a:solidFill>
+                  <a:srgbClr val="64748B"/>
+                </a:solidFill>
+              </a:rPr>
+              <a:t>□ 問い合わせ導線を入れた（LINE・電話・URL など）</a:t>
+            </a:r>
+          </a:p>
+          <a:p>
+            <a:r>
+              <a:rPr sz="1300" b="0" i="1">
+                <a:solidFill>
+                  <a:srgbClr val="64748B"/>
+                </a:solidFill>
+              </a:rPr>
+              <a:t>□ QRコードを追加した（左パネル → 要素 → QRコード）</a:t>
+            </a:r>
+          </a:p>
+          <a:p>
+            <a:r>
+              <a:rPr sz="1300" b="0" i="1">
+                <a:solidFill>
+                  <a:srgbClr val="64748B"/>
+                </a:solidFill>
+              </a:rPr>
+              <a:t>□ フォントを2種類以内に統一した</a:t>
+            </a:r>
+          </a:p>
+          <a:p>
+            <a:r>
+              <a:rPr sz="1300" b="0" i="1">
+                <a:solidFill>
+                  <a:srgbClr val="64748B"/>
+                </a:solidFill>
+              </a:rPr>
+              <a:t>□ 余白を確認した（詰め込みすぎていないか）</a:t>
+            </a:r>
+          </a:p>
+          <a:p>
+            <a:r>
+              <a:rPr sz="1300" b="0" i="1">
+                <a:solidFill>
+                  <a:srgbClr val="64748B"/>
+                </a:solidFill>
+              </a:rPr>
+              <a:t/>
+            </a:r>
+          </a:p>
+          <a:p>
             <a:r>
               <a:rPr sz="1300" b="0" i="1">
                 <a:solidFill>

--- a/00-01_han-ai/training-materials/course03_jissen_gazo.pptx
+++ b/00-01_han-ai/training-materials/course03_jissen_gazo.pptx
@@ -3099,7 +3099,7 @@
     <p:bg>
       <p:bgPr>
         <a:solidFill>
-          <a:srgbClr val="1E40AF"/>
+          <a:srgbClr val="1C1C1C"/>
         </a:solidFill>
         <a:effectLst/>
       </p:bgPr>
@@ -3180,7 +3180,7 @@
             <a:r>
               <a:rPr sz="1300" b="0" i="0">
                 <a:solidFill>
-                  <a:srgbClr val="93C5FD"/>
+                  <a:srgbClr val="DA7756"/>
                 </a:solidFill>
               </a:rPr>
               <a:t>ざつね屋</a:t>
@@ -3214,7 +3214,7 @@
             <a:r>
               <a:rPr sz="1800" b="0" i="0">
                 <a:solidFill>
-                  <a:srgbClr val="BFDBFE"/>
+                  <a:srgbClr val="B8A99A"/>
                 </a:solidFill>
               </a:rPr>
               <a:t>コース ③</a:t>
@@ -3282,7 +3282,7 @@
             <a:r>
               <a:rPr sz="1500" b="0" i="0">
                 <a:solidFill>
-                  <a:srgbClr val="BFDBFE"/>
+                  <a:srgbClr val="B8A99A"/>
                 </a:solidFill>
               </a:rPr>
               <a:t>デザイナー不在でもSNS・チラシ・広報のビジュアルが作れる 120分</a:t>
@@ -3316,7 +3316,7 @@
             <a:r>
               <a:rPr sz="1300" b="0" i="0">
                 <a:solidFill>
-                  <a:srgbClr val="93C5FD"/>
+                  <a:srgbClr val="DA7756"/>
                 </a:solidFill>
               </a:rPr>
               <a:t>ツール：Canva 無料版のみ　｜　成果物：SNS画像 + AI生成画像 + チラシ 各1点</a:t>
@@ -3335,6 +3335,14 @@
 <file path=ppt/slides/slide10.xml><?xml version="1.0" encoding="utf-8"?>
 <p:sld xmlns:a="http://schemas.openxmlformats.org/drawingml/2006/main" xmlns:p="http://schemas.openxmlformats.org/presentationml/2006/main" xmlns:r="http://schemas.openxmlformats.org/officeDocument/2006/relationships">
   <p:cSld>
+    <p:bg>
+      <p:bgPr>
+        <a:solidFill>
+          <a:srgbClr val="1C1C1C"/>
+        </a:solidFill>
+        <a:effectLst/>
+      </p:bgPr>
+    </p:bg>
     <p:spTree>
       <p:nvGrpSpPr>
         <p:cNvPr id="1" name=""/>
@@ -3357,7 +3365,7 @@
             <a:avLst/>
           </a:prstGeom>
           <a:solidFill>
-            <a:srgbClr val="1E40AF"/>
+            <a:srgbClr val="252525"/>
           </a:solidFill>
           <a:ln>
             <a:noFill/>
@@ -3445,7 +3453,7 @@
             <a:r>
               <a:rPr sz="1200" b="0" i="0">
                 <a:solidFill>
-                  <a:srgbClr val="93C5FD"/>
+                  <a:srgbClr val="DA7756"/>
                 </a:solidFill>
               </a:rPr>
               <a:t>[実践25分]</a:t>
@@ -3494,7 +3502,7 @@
                   </a:txBody>
                   <a:tcPr>
                     <a:solidFill>
-                      <a:srgbClr val="1E40AF"/>
+                      <a:srgbClr val="1C1C1C"/>
                     </a:solidFill>
                   </a:tcPr>
                 </a:tc>
@@ -3516,7 +3524,7 @@
                   </a:txBody>
                   <a:tcPr>
                     <a:solidFill>
-                      <a:srgbClr val="1E40AF"/>
+                      <a:srgbClr val="1C1C1C"/>
                     </a:solidFill>
                   </a:tcPr>
                 </a:tc>
@@ -3531,7 +3539,7 @@
                       <a:r>
                         <a:rPr sz="1100">
                           <a:solidFill>
-                            <a:srgbClr val="1E293B"/>
+                            <a:srgbClr val="EEEEEE"/>
                           </a:solidFill>
                         </a:rPr>
                         <a:t>1 Magic Mediaを開く</a:t>
@@ -3549,7 +3557,7 @@
                       <a:r>
                         <a:rPr sz="1100">
                           <a:solidFill>
-                            <a:srgbClr val="1E293B"/>
+                            <a:srgbClr val="EEEEEE"/>
                           </a:solidFill>
                         </a:rPr>
                         <a:t>Canvaエディタ左パネル「アプリ」→「Magic Media」を選択</a:t>
@@ -3569,7 +3577,7 @@
                       <a:r>
                         <a:rPr sz="1100">
                           <a:solidFill>
-                            <a:srgbClr val="1E293B"/>
+                            <a:srgbClr val="EEEEEE"/>
                           </a:solidFill>
                         </a:rPr>
                         <a:t>2 プロンプトを入力</a:t>
@@ -3591,7 +3599,7 @@
                       <a:r>
                         <a:rPr sz="1100">
                           <a:solidFill>
-                            <a:srgbClr val="1E293B"/>
+                            <a:srgbClr val="EEEEEE"/>
                           </a:solidFill>
                         </a:rPr>
                         <a:t>テキスト欄にひな型を使って指示を入力</a:t>
@@ -3615,7 +3623,7 @@
                       <a:r>
                         <a:rPr sz="1100">
                           <a:solidFill>
-                            <a:srgbClr val="1E293B"/>
+                            <a:srgbClr val="EEEEEE"/>
                           </a:solidFill>
                         </a:rPr>
                         <a:t>3 スタイルを選ぶ</a:t>
@@ -3633,7 +3641,7 @@
                       <a:r>
                         <a:rPr sz="1100">
                           <a:solidFill>
-                            <a:srgbClr val="1E293B"/>
+                            <a:srgbClr val="EEEEEE"/>
                           </a:solidFill>
                         </a:rPr>
                         <a:t>写真風・イラスト・水彩・3D等から選択（または「なし」でも可）</a:t>
@@ -3653,7 +3661,7 @@
                       <a:r>
                         <a:rPr sz="1100">
                           <a:solidFill>
-                            <a:srgbClr val="1E293B"/>
+                            <a:srgbClr val="EEEEEE"/>
                           </a:solidFill>
                         </a:rPr>
                         <a:t>4 生成 → 選択</a:t>
@@ -3675,7 +3683,7 @@
                       <a:r>
                         <a:rPr sz="1100">
                           <a:solidFill>
-                            <a:srgbClr val="1E293B"/>
+                            <a:srgbClr val="EEEEEE"/>
                           </a:solidFill>
                         </a:rPr>
                         <a:t>4枚生成される → 気に入ったものを選んでデザインに追加</a:t>
@@ -3699,7 +3707,7 @@
                       <a:r>
                         <a:rPr sz="1100">
                           <a:solidFill>
-                            <a:srgbClr val="1E293B"/>
+                            <a:srgbClr val="EEEEEE"/>
                           </a:solidFill>
                         </a:rPr>
                         <a:t>5 組み合わせ</a:t>
@@ -3717,7 +3725,7 @@
                       <a:r>
                         <a:rPr sz="1100">
                           <a:solidFill>
-                            <a:srgbClr val="1E293B"/>
+                            <a:srgbClr val="EEEEEE"/>
                           </a:solidFill>
                         </a:rPr>
                         <a:t>CanvaのテンプレートレイアウトにAI生成画像を貼り付けて仕上げる</a:t>
@@ -3819,6 +3827,14 @@
 <file path=ppt/slides/slide11.xml><?xml version="1.0" encoding="utf-8"?>
 <p:sld xmlns:a="http://schemas.openxmlformats.org/drawingml/2006/main" xmlns:p="http://schemas.openxmlformats.org/presentationml/2006/main" xmlns:r="http://schemas.openxmlformats.org/officeDocument/2006/relationships">
   <p:cSld>
+    <p:bg>
+      <p:bgPr>
+        <a:solidFill>
+          <a:srgbClr val="1C1C1C"/>
+        </a:solidFill>
+        <a:effectLst/>
+      </p:bgPr>
+    </p:bg>
     <p:spTree>
       <p:nvGrpSpPr>
         <p:cNvPr id="1" name=""/>
@@ -3841,7 +3857,7 @@
             <a:avLst/>
           </a:prstGeom>
           <a:solidFill>
-            <a:srgbClr val="1E40AF"/>
+            <a:srgbClr val="252525"/>
           </a:solidFill>
           <a:ln>
             <a:noFill/>
@@ -3918,7 +3934,7 @@
             <a:avLst/>
           </a:prstGeom>
           <a:solidFill>
-            <a:srgbClr val="EFF6FF"/>
+            <a:srgbClr val="2F2F2F"/>
           </a:solidFill>
           <a:ln>
             <a:noFill/>
@@ -3972,7 +3988,7 @@
             <a:r>
               <a:rPr sz="1400" b="1" i="0">
                 <a:solidFill>
-                  <a:srgbClr val="1E293B"/>
+                  <a:srgbClr val="EEEEEE"/>
                 </a:solidFill>
               </a:rPr>
               <a:t>ひな型：「[スタイル]で[主題・テーマ]の画像、[用途]向け、[雰囲気]な印象で」</a:t>
@@ -4104,7 +4120,7 @@
                   </a:txBody>
                   <a:tcPr>
                     <a:solidFill>
-                      <a:srgbClr val="1E40AF"/>
+                      <a:srgbClr val="1C1C1C"/>
                     </a:solidFill>
                   </a:tcPr>
                 </a:tc>
@@ -4126,7 +4142,7 @@
                   </a:txBody>
                   <a:tcPr>
                     <a:solidFill>
-                      <a:srgbClr val="1E40AF"/>
+                      <a:srgbClr val="1C1C1C"/>
                     </a:solidFill>
                   </a:tcPr>
                 </a:tc>
@@ -4141,7 +4157,7 @@
                       <a:r>
                         <a:rPr sz="1100">
                           <a:solidFill>
-                            <a:srgbClr val="1E293B"/>
+                            <a:srgbClr val="EEEEEE"/>
                           </a:solidFill>
                         </a:rPr>
                         <a:t>会社・店舗の雰囲気画像</a:t>
@@ -4159,7 +4175,7 @@
                       <a:r>
                         <a:rPr sz="1100">
                           <a:solidFill>
-                            <a:srgbClr val="1E293B"/>
+                            <a:srgbClr val="EEEEEE"/>
                           </a:solidFill>
                         </a:rPr>
                         <a:t>業種・場所・雰囲気（清潔感・温かみ・プロフェッショナル等）を指定</a:t>
@@ -4179,7 +4195,7 @@
                       <a:r>
                         <a:rPr sz="1100">
                           <a:solidFill>
-                            <a:srgbClr val="1E293B"/>
+                            <a:srgbClr val="EEEEEE"/>
                           </a:solidFill>
                         </a:rPr>
                         <a:t>商品・サービスのイメージ</a:t>
@@ -4201,7 +4217,7 @@
                       <a:r>
                         <a:rPr sz="1100">
                           <a:solidFill>
-                            <a:srgbClr val="1E293B"/>
+                            <a:srgbClr val="EEEEEE"/>
                           </a:solidFill>
                         </a:rPr>
                         <a:t>商品の特徴・使用シーン・ターゲット感を伝える</a:t>
@@ -4225,7 +4241,7 @@
                       <a:r>
                         <a:rPr sz="1100">
                           <a:solidFill>
-                            <a:srgbClr val="1E293B"/>
+                            <a:srgbClr val="EEEEEE"/>
                           </a:solidFill>
                         </a:rPr>
                         <a:t>SNS用の背景・素材</a:t>
@@ -4243,7 +4259,7 @@
                       <a:r>
                         <a:rPr sz="1100">
                           <a:solidFill>
-                            <a:srgbClr val="1E293B"/>
+                            <a:srgbClr val="EEEEEE"/>
                           </a:solidFill>
                         </a:rPr>
                         <a:t>「シンプル背景」「テキスト入りやすい余白あり」等を指定</a:t>
@@ -4263,7 +4279,7 @@
                       <a:r>
                         <a:rPr sz="1100">
                           <a:solidFill>
-                            <a:srgbClr val="1E293B"/>
+                            <a:srgbClr val="EEEEEE"/>
                           </a:solidFill>
                         </a:rPr>
                         <a:t>採用広報用のシーン画像</a:t>
@@ -4285,7 +4301,7 @@
                       <a:r>
                         <a:rPr sz="1100">
                           <a:solidFill>
-                            <a:srgbClr val="1E293B"/>
+                            <a:srgbClr val="EEEEEE"/>
                           </a:solidFill>
                         </a:rPr>
                         <a:t>「職場で働くスタッフ」「チームワーク」等・人物は指定しにくい場合あり</a:t>
@@ -4317,7 +4333,7 @@
     <p:bg>
       <p:bgPr>
         <a:solidFill>
-          <a:srgbClr val="1E40AF"/>
+          <a:srgbClr val="1C1C1C"/>
         </a:solidFill>
         <a:effectLst/>
       </p:bgPr>
@@ -4355,7 +4371,7 @@
             <a:r>
               <a:rPr sz="4000" b="1" i="0">
                 <a:solidFill>
-                  <a:srgbClr val="BFDBFE"/>
+                  <a:srgbClr val="B8A99A"/>
                 </a:solidFill>
               </a:rPr>
               <a:t>- 休憩 -</a:t>
@@ -4389,7 +4405,7 @@
             <a:r>
               <a:rPr sz="1800" b="0" i="0">
                 <a:solidFill>
-                  <a:srgbClr val="93C5FD"/>
+                  <a:srgbClr val="DA7756"/>
                 </a:solidFill>
               </a:rPr>
               <a:t>5〜10分</a:t>
@@ -4411,7 +4427,7 @@
     <p:bg>
       <p:bgPr>
         <a:solidFill>
-          <a:srgbClr val="1E40AF"/>
+          <a:srgbClr val="1C1C1C"/>
         </a:solidFill>
         <a:effectLst/>
       </p:bgPr>
@@ -4560,7 +4576,7 @@
             <a:r>
               <a:rPr sz="1400" b="0" i="0">
                 <a:solidFill>
-                  <a:srgbClr val="93C5FD"/>
+                  <a:srgbClr val="DA7756"/>
                 </a:solidFill>
               </a:rPr>
               <a:t>[30分]</a:t>
@@ -4594,7 +4610,7 @@
             <a:r>
               <a:rPr sz="1500" b="0" i="0">
                 <a:solidFill>
-                  <a:srgbClr val="BFDBFE"/>
+                  <a:srgbClr val="B8A99A"/>
                 </a:solidFill>
               </a:rPr>
               <a:t>Magic Designでレイアウト自動生成 → AI画像差し込み → チェックリストで仕上げ</a:t>
@@ -4613,6 +4629,14 @@
 <file path=ppt/slides/slide14.xml><?xml version="1.0" encoding="utf-8"?>
 <p:sld xmlns:a="http://schemas.openxmlformats.org/drawingml/2006/main" xmlns:p="http://schemas.openxmlformats.org/presentationml/2006/main" xmlns:r="http://schemas.openxmlformats.org/officeDocument/2006/relationships">
   <p:cSld>
+    <p:bg>
+      <p:bgPr>
+        <a:solidFill>
+          <a:srgbClr val="1C1C1C"/>
+        </a:solidFill>
+        <a:effectLst/>
+      </p:bgPr>
+    </p:bg>
     <p:spTree>
       <p:nvGrpSpPr>
         <p:cNvPr id="1" name=""/>
@@ -4635,7 +4659,7 @@
             <a:avLst/>
           </a:prstGeom>
           <a:solidFill>
-            <a:srgbClr val="1E40AF"/>
+            <a:srgbClr val="252525"/>
           </a:solidFill>
           <a:ln>
             <a:noFill/>
@@ -4723,7 +4747,7 @@
             <a:r>
               <a:rPr sz="1200" b="0" i="0">
                 <a:solidFill>
-                  <a:srgbClr val="93C5FD"/>
+                  <a:srgbClr val="DA7756"/>
                 </a:solidFill>
               </a:rPr>
               <a:t>[30分]</a:t>
@@ -4773,7 +4797,7 @@
                   </a:txBody>
                   <a:tcPr>
                     <a:solidFill>
-                      <a:srgbClr val="1E40AF"/>
+                      <a:srgbClr val="1C1C1C"/>
                     </a:solidFill>
                   </a:tcPr>
                 </a:tc>
@@ -4795,7 +4819,7 @@
                   </a:txBody>
                   <a:tcPr>
                     <a:solidFill>
-                      <a:srgbClr val="1E40AF"/>
+                      <a:srgbClr val="1C1C1C"/>
                     </a:solidFill>
                   </a:tcPr>
                 </a:tc>
@@ -4817,7 +4841,7 @@
                   </a:txBody>
                   <a:tcPr>
                     <a:solidFill>
-                      <a:srgbClr val="1E40AF"/>
+                      <a:srgbClr val="1C1C1C"/>
                     </a:solidFill>
                   </a:tcPr>
                 </a:tc>
@@ -4832,7 +4856,7 @@
                       <a:r>
                         <a:rPr sz="1100">
                           <a:solidFill>
-                            <a:srgbClr val="1E293B"/>
+                            <a:srgbClr val="EEEEEE"/>
                           </a:solidFill>
                         </a:rPr>
                         <a:t>1</a:t>
@@ -4850,7 +4874,7 @@
                       <a:r>
                         <a:rPr sz="1100">
                           <a:solidFill>
-                            <a:srgbClr val="1E293B"/>
+                            <a:srgbClr val="EEEEEE"/>
                           </a:solidFill>
                         </a:rPr>
                         <a:t>「デザインを作成」→「A4チラシ」（または任意のサイズ）を選択</a:t>
@@ -4868,7 +4892,7 @@
                       <a:r>
                         <a:rPr sz="1100">
                           <a:solidFill>
-                            <a:srgbClr val="1E293B"/>
+                            <a:srgbClr val="EEEEEE"/>
                           </a:solidFill>
                         </a:rPr>
                         <a:t>3分</a:t>
@@ -4888,7 +4912,7 @@
                       <a:r>
                         <a:rPr sz="1100">
                           <a:solidFill>
-                            <a:srgbClr val="1E293B"/>
+                            <a:srgbClr val="EEEEEE"/>
                           </a:solidFill>
                         </a:rPr>
                         <a:t>2</a:t>
@@ -4910,7 +4934,7 @@
                       <a:r>
                         <a:rPr sz="1100">
                           <a:solidFill>
-                            <a:srgbClr val="1E293B"/>
+                            <a:srgbClr val="EEEEEE"/>
                           </a:solidFill>
                         </a:rPr>
                         <a:t>テンプレートを選択（業種・用途で絞り込み）</a:t>
@@ -4932,7 +4956,7 @@
                       <a:r>
                         <a:rPr sz="1100">
                           <a:solidFill>
-                            <a:srgbClr val="1E293B"/>
+                            <a:srgbClr val="EEEEEE"/>
                           </a:solidFill>
                         </a:rPr>
                         <a:t>5分</a:t>
@@ -4956,7 +4980,7 @@
                       <a:r>
                         <a:rPr sz="1100">
                           <a:solidFill>
-                            <a:srgbClr val="1E293B"/>
+                            <a:srgbClr val="EEEEEE"/>
                           </a:solidFill>
                         </a:rPr>
                         <a:t>3</a:t>
@@ -4974,7 +4998,7 @@
                       <a:r>
                         <a:rPr sz="1100">
                           <a:solidFill>
-                            <a:srgbClr val="1E293B"/>
+                            <a:srgbClr val="EEEEEE"/>
                           </a:solidFill>
                         </a:rPr>
                         <a:t>セクション3で生成したAI画像をアップロード or 再生成して挿入</a:t>
@@ -4992,7 +5016,7 @@
                       <a:r>
                         <a:rPr sz="1100">
                           <a:solidFill>
-                            <a:srgbClr val="1E293B"/>
+                            <a:srgbClr val="EEEEEE"/>
                           </a:solidFill>
                         </a:rPr>
                         <a:t>7分</a:t>
@@ -5012,7 +5036,7 @@
                       <a:r>
                         <a:rPr sz="1100">
                           <a:solidFill>
-                            <a:srgbClr val="1E293B"/>
+                            <a:srgbClr val="EEEEEE"/>
                           </a:solidFill>
                         </a:rPr>
                         <a:t>4</a:t>
@@ -5034,7 +5058,7 @@
                       <a:r>
                         <a:rPr sz="1100">
                           <a:solidFill>
-                            <a:srgbClr val="1E293B"/>
+                            <a:srgbClr val="EEEEEE"/>
                           </a:solidFill>
                         </a:rPr>
                         <a:t>テキスト（キャッチコピー・住所・電話番号等）を自社の内容に差し替え</a:t>
@@ -5056,7 +5080,7 @@
                       <a:r>
                         <a:rPr sz="1100">
                           <a:solidFill>
-                            <a:srgbClr val="1E293B"/>
+                            <a:srgbClr val="EEEEEE"/>
                           </a:solidFill>
                         </a:rPr>
                         <a:t>10分</a:t>
@@ -5080,7 +5104,7 @@
                       <a:r>
                         <a:rPr sz="1100">
                           <a:solidFill>
-                            <a:srgbClr val="1E293B"/>
+                            <a:srgbClr val="EEEEEE"/>
                           </a:solidFill>
                         </a:rPr>
                         <a:t>5</a:t>
@@ -5098,7 +5122,7 @@
                       <a:r>
                         <a:rPr sz="1100">
                           <a:solidFill>
-                            <a:srgbClr val="1E293B"/>
+                            <a:srgbClr val="EEEEEE"/>
                           </a:solidFill>
                         </a:rPr>
                         <a:t>PDF または PNG でダウンロード</a:t>
@@ -5116,7 +5140,7 @@
                       <a:r>
                         <a:rPr sz="1100">
                           <a:solidFill>
-                            <a:srgbClr val="1E293B"/>
+                            <a:srgbClr val="EEEEEE"/>
                           </a:solidFill>
                         </a:rPr>
                         <a:t>5分</a:t>
@@ -5367,7 +5391,7 @@
     <p:bg>
       <p:bgPr>
         <a:solidFill>
-          <a:srgbClr val="1E40AF"/>
+          <a:srgbClr val="1C1C1C"/>
         </a:solidFill>
         <a:effectLst/>
       </p:bgPr>
@@ -5516,7 +5540,7 @@
             <a:r>
               <a:rPr sz="1400" b="0" i="0">
                 <a:solidFill>
-                  <a:srgbClr val="93C5FD"/>
+                  <a:srgbClr val="DA7756"/>
                 </a:solidFill>
               </a:rPr>
               <a:t>[10分]</a:t>
@@ -5550,7 +5574,7 @@
             <a:r>
               <a:rPr sz="1500" b="0" i="0">
                 <a:solidFill>
-                  <a:srgbClr val="BFDBFE"/>
+                  <a:srgbClr val="B8A99A"/>
                 </a:solidFill>
               </a:rPr>
               <a:t>ダウンロード・共有・活用アドバイス</a:t>
@@ -5569,6 +5593,14 @@
 <file path=ppt/slides/slide16.xml><?xml version="1.0" encoding="utf-8"?>
 <p:sld xmlns:a="http://schemas.openxmlformats.org/drawingml/2006/main" xmlns:p="http://schemas.openxmlformats.org/presentationml/2006/main" xmlns:r="http://schemas.openxmlformats.org/officeDocument/2006/relationships">
   <p:cSld>
+    <p:bg>
+      <p:bgPr>
+        <a:solidFill>
+          <a:srgbClr val="1C1C1C"/>
+        </a:solidFill>
+        <a:effectLst/>
+      </p:bgPr>
+    </p:bg>
     <p:spTree>
       <p:nvGrpSpPr>
         <p:cNvPr id="1" name=""/>
@@ -5591,7 +5623,7 @@
             <a:avLst/>
           </a:prstGeom>
           <a:solidFill>
-            <a:srgbClr val="1E40AF"/>
+            <a:srgbClr val="252525"/>
           </a:solidFill>
           <a:ln>
             <a:noFill/>
@@ -5679,7 +5711,7 @@
             <a:r>
               <a:rPr sz="1200" b="0" i="0">
                 <a:solidFill>
-                  <a:srgbClr val="93C5FD"/>
+                  <a:srgbClr val="DA7756"/>
                 </a:solidFill>
               </a:rPr>
               <a:t>[10分]</a:t>
@@ -5728,7 +5760,7 @@
                   </a:txBody>
                   <a:tcPr>
                     <a:solidFill>
-                      <a:srgbClr val="1E40AF"/>
+                      <a:srgbClr val="1C1C1C"/>
                     </a:solidFill>
                   </a:tcPr>
                 </a:tc>
@@ -5750,7 +5782,7 @@
                   </a:txBody>
                   <a:tcPr>
                     <a:solidFill>
-                      <a:srgbClr val="1E40AF"/>
+                      <a:srgbClr val="1C1C1C"/>
                     </a:solidFill>
                   </a:tcPr>
                 </a:tc>
@@ -5765,7 +5797,7 @@
                       <a:r>
                         <a:rPr sz="1100">
                           <a:solidFill>
-                            <a:srgbClr val="1E293B"/>
+                            <a:srgbClr val="EEEEEE"/>
                           </a:solidFill>
                         </a:rPr>
                         <a:t>ダウンロード</a:t>
@@ -5783,7 +5815,7 @@
                       <a:r>
                         <a:rPr sz="1100">
                           <a:solidFill>
-                            <a:srgbClr val="1E293B"/>
+                            <a:srgbClr val="EEEEEE"/>
                           </a:solidFill>
                         </a:rPr>
                         <a:t>PNG（SNS・メール用）・PDF（印刷用）どちらでも書き出せる</a:t>
@@ -5803,7 +5835,7 @@
                       <a:r>
                         <a:rPr sz="1100">
                           <a:solidFill>
-                            <a:srgbClr val="1E293B"/>
+                            <a:srgbClr val="EEEEEE"/>
                           </a:solidFill>
                         </a:rPr>
                         <a:t>後から編集</a:t>
@@ -5825,7 +5857,7 @@
                       <a:r>
                         <a:rPr sz="1100">
                           <a:solidFill>
-                            <a:srgbClr val="1E293B"/>
+                            <a:srgbClr val="EEEEEE"/>
                           </a:solidFill>
                         </a:rPr>
                         <a:t>Canvaアカウントにログインすれば続きから編集・複製して使い回せる</a:t>
@@ -5849,7 +5881,7 @@
                       <a:r>
                         <a:rPr sz="1100">
                           <a:solidFill>
-                            <a:srgbClr val="1E293B"/>
+                            <a:srgbClr val="EEEEEE"/>
                           </a:solidFill>
                         </a:rPr>
                         <a:t>社内共有</a:t>
@@ -5867,7 +5899,7 @@
                       <a:r>
                         <a:rPr sz="1100">
                           <a:solidFill>
-                            <a:srgbClr val="1E293B"/>
+                            <a:srgbClr val="EEEEEE"/>
                           </a:solidFill>
                         </a:rPr>
                         <a:t>共有リンクを送るだけで他のメンバーも閲覧・編集できる</a:t>
@@ -5887,7 +5919,7 @@
                       <a:r>
                         <a:rPr sz="1100">
                           <a:solidFill>
-                            <a:srgbClr val="1E293B"/>
+                            <a:srgbClr val="EEEEEE"/>
                           </a:solidFill>
                         </a:rPr>
                         <a:t>ブランドの統一</a:t>
@@ -5909,7 +5941,7 @@
                       <a:r>
                         <a:rPr sz="1100">
                           <a:solidFill>
-                            <a:srgbClr val="1E293B"/>
+                            <a:srgbClr val="EEEEEE"/>
                           </a:solidFill>
                         </a:rPr>
                         <a:t>ブランドカラー・フォントを「ブランド設定」に登録して毎回使う</a:t>
@@ -5933,7 +5965,7 @@
                       <a:r>
                         <a:rPr sz="1100">
                           <a:solidFill>
-                            <a:srgbClr val="1E293B"/>
+                            <a:srgbClr val="EEEEEE"/>
                           </a:solidFill>
                         </a:rPr>
                         <a:t>テンプレとして使い回す</a:t>
@@ -5951,7 +5983,7 @@
                       <a:r>
                         <a:rPr sz="1100">
                           <a:solidFill>
-                            <a:srgbClr val="1E293B"/>
+                            <a:srgbClr val="EEEEEE"/>
                           </a:solidFill>
                         </a:rPr>
                         <a:t>一度作ったデザインを複製して内容だけ変えれば量産可能</a:t>
@@ -5980,7 +6012,7 @@
             <a:avLst/>
           </a:prstGeom>
           <a:solidFill>
-            <a:srgbClr val="EFF6FF"/>
+            <a:srgbClr val="2F2F2F"/>
           </a:solidFill>
           <a:ln>
             <a:noFill/>
@@ -6034,7 +6066,7 @@
             <a:r>
               <a:rPr sz="1300" b="1" i="0">
                 <a:solidFill>
-                  <a:srgbClr val="1E40AF"/>
+                  <a:srgbClr val="1C1C1C"/>
                 </a:solidFill>
               </a:rPr>
               <a:t>次のステップ：実践編（動画系）でCanvaの動画機能、または実践編（文書系）でテキスト発信の質も上げましょう</a:t>
@@ -6053,6 +6085,14 @@
 <file path=ppt/slides/slide2.xml><?xml version="1.0" encoding="utf-8"?>
 <p:sld xmlns:a="http://schemas.openxmlformats.org/drawingml/2006/main" xmlns:p="http://schemas.openxmlformats.org/presentationml/2006/main" xmlns:r="http://schemas.openxmlformats.org/officeDocument/2006/relationships">
   <p:cSld>
+    <p:bg>
+      <p:bgPr>
+        <a:solidFill>
+          <a:srgbClr val="1C1C1C"/>
+        </a:solidFill>
+        <a:effectLst/>
+      </p:bgPr>
+    </p:bg>
     <p:spTree>
       <p:nvGrpSpPr>
         <p:cNvPr id="1" name=""/>
@@ -6075,7 +6115,7 @@
             <a:avLst/>
           </a:prstGeom>
           <a:solidFill>
-            <a:srgbClr val="1E40AF"/>
+            <a:srgbClr val="252525"/>
           </a:solidFill>
           <a:ln>
             <a:noFill/>
@@ -6180,7 +6220,7 @@
                   </a:txBody>
                   <a:tcPr>
                     <a:solidFill>
-                      <a:srgbClr val="1E40AF"/>
+                      <a:srgbClr val="1C1C1C"/>
                     </a:solidFill>
                   </a:tcPr>
                 </a:tc>
@@ -6202,7 +6242,7 @@
                   </a:txBody>
                   <a:tcPr>
                     <a:solidFill>
-                      <a:srgbClr val="1E40AF"/>
+                      <a:srgbClr val="1C1C1C"/>
                     </a:solidFill>
                   </a:tcPr>
                 </a:tc>
@@ -6224,7 +6264,7 @@
                   </a:txBody>
                   <a:tcPr>
                     <a:solidFill>
-                      <a:srgbClr val="1E40AF"/>
+                      <a:srgbClr val="1C1C1C"/>
                     </a:solidFill>
                   </a:tcPr>
                 </a:tc>
@@ -6246,7 +6286,7 @@
                   </a:txBody>
                   <a:tcPr>
                     <a:solidFill>
-                      <a:srgbClr val="1E40AF"/>
+                      <a:srgbClr val="1C1C1C"/>
                     </a:solidFill>
                   </a:tcPr>
                 </a:tc>
@@ -6261,7 +6301,7 @@
                       <a:r>
                         <a:rPr sz="1100">
                           <a:solidFill>
-                            <a:srgbClr val="1E293B"/>
+                            <a:srgbClr val="EEEEEE"/>
                           </a:solidFill>
                         </a:rPr>
                         <a:t>1</a:t>
@@ -6279,7 +6319,7 @@
                       <a:r>
                         <a:rPr sz="1100">
                           <a:solidFill>
-                            <a:srgbClr val="1E293B"/>
+                            <a:srgbClr val="EEEEEE"/>
                           </a:solidFill>
                         </a:rPr>
                         <a:t>イントロ</a:t>
@@ -6297,7 +6337,7 @@
                       <a:r>
                         <a:rPr sz="1100">
                           <a:solidFill>
-                            <a:srgbClr val="1E293B"/>
+                            <a:srgbClr val="EEEEEE"/>
                           </a:solidFill>
                         </a:rPr>
                         <a:t>Canvaログイン確認・基本画面の説明</a:t>
@@ -6315,7 +6355,7 @@
                       <a:r>
                         <a:rPr sz="1100">
                           <a:solidFill>
-                            <a:srgbClr val="1E293B"/>
+                            <a:srgbClr val="EEEEEE"/>
                           </a:solidFill>
                         </a:rPr>
                         <a:t>10分</a:t>
@@ -6335,7 +6375,7 @@
                       <a:r>
                         <a:rPr sz="1100">
                           <a:solidFill>
-                            <a:srgbClr val="1E293B"/>
+                            <a:srgbClr val="EEEEEE"/>
                           </a:solidFill>
                         </a:rPr>
                         <a:t>2</a:t>
@@ -6357,7 +6397,7 @@
                       <a:r>
                         <a:rPr sz="1100">
                           <a:solidFill>
-                            <a:srgbClr val="1E293B"/>
+                            <a:srgbClr val="EEEEEE"/>
                           </a:solidFill>
                         </a:rPr>
                         <a:t>SNS投稿画像</a:t>
@@ -6379,7 +6419,7 @@
                       <a:r>
                         <a:rPr sz="1100">
                           <a:solidFill>
-                            <a:srgbClr val="1E293B"/>
+                            <a:srgbClr val="EEEEEE"/>
                           </a:solidFill>
                         </a:rPr>
                         <a:t>Canvaテンプレートで編集実践</a:t>
@@ -6401,7 +6441,7 @@
                       <a:r>
                         <a:rPr sz="1100">
                           <a:solidFill>
-                            <a:srgbClr val="1E293B"/>
+                            <a:srgbClr val="EEEEEE"/>
                           </a:solidFill>
                         </a:rPr>
                         <a:t>30分</a:t>
@@ -6425,7 +6465,7 @@
                       <a:r>
                         <a:rPr sz="1100">
                           <a:solidFill>
-                            <a:srgbClr val="1E293B"/>
+                            <a:srgbClr val="EEEEEE"/>
                           </a:solidFill>
                         </a:rPr>
                         <a:t>3</a:t>
@@ -6443,7 +6483,7 @@
                       <a:r>
                         <a:rPr sz="1100">
                           <a:solidFill>
-                            <a:srgbClr val="1E293B"/>
+                            <a:srgbClr val="EEEEEE"/>
                           </a:solidFill>
                         </a:rPr>
                         <a:t>AI画像生成</a:t>
@@ -6461,7 +6501,7 @@
                       <a:r>
                         <a:rPr sz="1100">
                           <a:solidFill>
-                            <a:srgbClr val="1E293B"/>
+                            <a:srgbClr val="EEEEEE"/>
                           </a:solidFill>
                         </a:rPr>
                         <a:t>Magic Mediaでプロンプト入力→生成</a:t>
@@ -6479,7 +6519,7 @@
                       <a:r>
                         <a:rPr sz="1100">
                           <a:solidFill>
-                            <a:srgbClr val="1E293B"/>
+                            <a:srgbClr val="EEEEEE"/>
                           </a:solidFill>
                         </a:rPr>
                         <a:t>30分</a:t>
@@ -6499,7 +6539,7 @@
                       <a:r>
                         <a:rPr sz="1100">
                           <a:solidFill>
-                            <a:srgbClr val="1E293B"/>
+                            <a:srgbClr val="EEEEEE"/>
                           </a:solidFill>
                         </a:rPr>
                         <a:t>—</a:t>
@@ -6521,7 +6561,7 @@
                       <a:r>
                         <a:rPr sz="1100">
                           <a:solidFill>
-                            <a:srgbClr val="1E293B"/>
+                            <a:srgbClr val="EEEEEE"/>
                           </a:solidFill>
                         </a:rPr>
                         <a:t>休憩</a:t>
@@ -6543,7 +6583,7 @@
                       <a:r>
                         <a:rPr sz="1100">
                           <a:solidFill>
-                            <a:srgbClr val="1E293B"/>
+                            <a:srgbClr val="EEEEEE"/>
                           </a:solidFill>
                         </a:rPr>
                         <a:t/>
@@ -6565,7 +6605,7 @@
                       <a:r>
                         <a:rPr sz="1100">
                           <a:solidFill>
-                            <a:srgbClr val="1E293B"/>
+                            <a:srgbClr val="EEEEEE"/>
                           </a:solidFill>
                         </a:rPr>
                         <a:t>10分</a:t>
@@ -6589,7 +6629,7 @@
                       <a:r>
                         <a:rPr sz="1100">
                           <a:solidFill>
-                            <a:srgbClr val="1E293B"/>
+                            <a:srgbClr val="EEEEEE"/>
                           </a:solidFill>
                         </a:rPr>
                         <a:t>4</a:t>
@@ -6607,7 +6647,7 @@
                       <a:r>
                         <a:rPr sz="1100">
                           <a:solidFill>
-                            <a:srgbClr val="1E293B"/>
+                            <a:srgbClr val="EEEEEE"/>
                           </a:solidFill>
                         </a:rPr>
                         <a:t>チラシ作成</a:t>
@@ -6625,7 +6665,7 @@
                       <a:r>
                         <a:rPr sz="1100">
                           <a:solidFill>
-                            <a:srgbClr val="1E293B"/>
+                            <a:srgbClr val="EEEEEE"/>
                           </a:solidFill>
                         </a:rPr>
                         <a:t>テンプレ＋AI画像を組み合わせて仕上げる</a:t>
@@ -6643,7 +6683,7 @@
                       <a:r>
                         <a:rPr sz="1100">
                           <a:solidFill>
-                            <a:srgbClr val="1E293B"/>
+                            <a:srgbClr val="EEEEEE"/>
                           </a:solidFill>
                         </a:rPr>
                         <a:t>30分</a:t>
@@ -6663,7 +6703,7 @@
                       <a:r>
                         <a:rPr sz="1100">
                           <a:solidFill>
-                            <a:srgbClr val="1E293B"/>
+                            <a:srgbClr val="EEEEEE"/>
                           </a:solidFill>
                         </a:rPr>
                         <a:t>5</a:t>
@@ -6685,7 +6725,7 @@
                       <a:r>
                         <a:rPr sz="1100">
                           <a:solidFill>
-                            <a:srgbClr val="1E293B"/>
+                            <a:srgbClr val="EEEEEE"/>
                           </a:solidFill>
                         </a:rPr>
                         <a:t>まとめ</a:t>
@@ -6707,7 +6747,7 @@
                       <a:r>
                         <a:rPr sz="1100">
                           <a:solidFill>
-                            <a:srgbClr val="1E293B"/>
+                            <a:srgbClr val="EEEEEE"/>
                           </a:solidFill>
                         </a:rPr>
                         <a:t>ダウンロード・共有・活用アドバイス</a:t>
@@ -6729,7 +6769,7 @@
                       <a:r>
                         <a:rPr sz="1100">
                           <a:solidFill>
-                            <a:srgbClr val="1E293B"/>
+                            <a:srgbClr val="EEEEEE"/>
                           </a:solidFill>
                         </a:rPr>
                         <a:t>10分</a:t>
@@ -6761,7 +6801,7 @@
     <p:bg>
       <p:bgPr>
         <a:solidFill>
-          <a:srgbClr val="1E40AF"/>
+          <a:srgbClr val="1C1C1C"/>
         </a:solidFill>
         <a:effectLst/>
       </p:bgPr>
@@ -6910,7 +6950,7 @@
             <a:r>
               <a:rPr sz="1400" b="0" i="0">
                 <a:solidFill>
-                  <a:srgbClr val="93C5FD"/>
+                  <a:srgbClr val="DA7756"/>
                 </a:solidFill>
               </a:rPr>
               <a:t>[10分]</a:t>
@@ -6944,7 +6984,7 @@
             <a:r>
               <a:rPr sz="1500" b="0" i="0">
                 <a:solidFill>
-                  <a:srgbClr val="BFDBFE"/>
+                  <a:srgbClr val="B8A99A"/>
                 </a:solidFill>
               </a:rPr>
               <a:t>Canvaにログインして基本画面を確認</a:t>
@@ -6963,6 +7003,14 @@
 <file path=ppt/slides/slide4.xml><?xml version="1.0" encoding="utf-8"?>
 <p:sld xmlns:a="http://schemas.openxmlformats.org/drawingml/2006/main" xmlns:p="http://schemas.openxmlformats.org/presentationml/2006/main" xmlns:r="http://schemas.openxmlformats.org/officeDocument/2006/relationships">
   <p:cSld>
+    <p:bg>
+      <p:bgPr>
+        <a:solidFill>
+          <a:srgbClr val="1C1C1C"/>
+        </a:solidFill>
+        <a:effectLst/>
+      </p:bgPr>
+    </p:bg>
     <p:spTree>
       <p:nvGrpSpPr>
         <p:cNvPr id="1" name=""/>
@@ -6985,7 +7033,7 @@
             <a:avLst/>
           </a:prstGeom>
           <a:solidFill>
-            <a:srgbClr val="1E40AF"/>
+            <a:srgbClr val="252525"/>
           </a:solidFill>
           <a:ln>
             <a:noFill/>
@@ -7073,7 +7121,7 @@
             <a:r>
               <a:rPr sz="1200" b="0" i="0">
                 <a:solidFill>
-                  <a:srgbClr val="93C5FD"/>
+                  <a:srgbClr val="DA7756"/>
                 </a:solidFill>
               </a:rPr>
               <a:t>[10分]</a:t>
@@ -7122,7 +7170,7 @@
                   </a:txBody>
                   <a:tcPr>
                     <a:solidFill>
-                      <a:srgbClr val="1E40AF"/>
+                      <a:srgbClr val="1C1C1C"/>
                     </a:solidFill>
                   </a:tcPr>
                 </a:tc>
@@ -7144,7 +7192,7 @@
                   </a:txBody>
                   <a:tcPr>
                     <a:solidFill>
-                      <a:srgbClr val="1E40AF"/>
+                      <a:srgbClr val="1C1C1C"/>
                     </a:solidFill>
                   </a:tcPr>
                 </a:tc>
@@ -7159,7 +7207,7 @@
                       <a:r>
                         <a:rPr sz="1100">
                           <a:solidFill>
-                            <a:srgbClr val="1E293B"/>
+                            <a:srgbClr val="EEEEEE"/>
                           </a:solidFill>
                         </a:rPr>
                         <a:t>Canvaログイン</a:t>
@@ -7177,7 +7225,7 @@
                       <a:r>
                         <a:rPr sz="1100">
                           <a:solidFill>
-                            <a:srgbClr val="1E293B"/>
+                            <a:srgbClr val="EEEEEE"/>
                           </a:solidFill>
                         </a:rPr>
                         <a:t>canva.com でGoogleアカウント or メールアドレスで登録・ログイン（無料版）</a:t>
@@ -7197,7 +7245,7 @@
                       <a:r>
                         <a:rPr sz="1100">
                           <a:solidFill>
-                            <a:srgbClr val="1E293B"/>
+                            <a:srgbClr val="EEEEEE"/>
                           </a:solidFill>
                         </a:rPr>
                         <a:t>新規デザイン作成</a:t>
@@ -7219,7 +7267,7 @@
                       <a:r>
                         <a:rPr sz="1100">
                           <a:solidFill>
-                            <a:srgbClr val="1E293B"/>
+                            <a:srgbClr val="EEEEEE"/>
                           </a:solidFill>
                         </a:rPr>
                         <a:t>「デザインを作成」→ 用途を選ぶ（SNS投稿・チラシ等）</a:t>
@@ -7243,7 +7291,7 @@
                       <a:r>
                         <a:rPr sz="1100">
                           <a:solidFill>
-                            <a:srgbClr val="1E293B"/>
+                            <a:srgbClr val="EEEEEE"/>
                           </a:solidFill>
                         </a:rPr>
                         <a:t>テンプレート</a:t>
@@ -7261,7 +7309,7 @@
                       <a:r>
                         <a:rPr sz="1100">
                           <a:solidFill>
-                            <a:srgbClr val="1E293B"/>
+                            <a:srgbClr val="EEEEEE"/>
                           </a:solidFill>
                         </a:rPr>
                         <a:t>Canvaが用意している「使える雛形」を選んで文字・色・画像を差し替える</a:t>
@@ -7281,7 +7329,7 @@
                       <a:r>
                         <a:rPr sz="1100">
                           <a:solidFill>
-                            <a:srgbClr val="1E293B"/>
+                            <a:srgbClr val="EEEEEE"/>
                           </a:solidFill>
                         </a:rPr>
                         <a:t>Magic Media</a:t>
@@ -7303,7 +7351,7 @@
                       <a:r>
                         <a:rPr sz="1100">
                           <a:solidFill>
-                            <a:srgbClr val="1E293B"/>
+                            <a:srgbClr val="EEEEEE"/>
                           </a:solidFill>
                         </a:rPr>
                         <a:t>AIで画像生成できる機能（無料枠：月50回程度）</a:t>
@@ -7347,7 +7395,7 @@
             <a:r>
               <a:rPr sz="1400" b="1" i="0">
                 <a:solidFill>
-                  <a:srgbClr val="1E40AF"/>
+                  <a:srgbClr val="1C1C1C"/>
                 </a:solidFill>
               </a:rPr>
               <a:t>今日の流れ：Canva操作を覚える → AI素材を作る → 両方を組み合わせて完成品を作る</a:t>
@@ -7366,6 +7414,14 @@
 <file path=ppt/slides/slide5.xml><?xml version="1.0" encoding="utf-8"?>
 <p:sld xmlns:a="http://schemas.openxmlformats.org/drawingml/2006/main" xmlns:p="http://schemas.openxmlformats.org/presentationml/2006/main" xmlns:r="http://schemas.openxmlformats.org/officeDocument/2006/relationships">
   <p:cSld>
+    <p:bg>
+      <p:bgPr>
+        <a:solidFill>
+          <a:srgbClr val="1C1C1C"/>
+        </a:solidFill>
+        <a:effectLst/>
+      </p:bgPr>
+    </p:bg>
     <p:spTree>
       <p:nvGrpSpPr>
         <p:cNvPr id="1" name=""/>
@@ -7388,7 +7444,7 @@
             <a:avLst/>
           </a:prstGeom>
           <a:solidFill>
-            <a:srgbClr val="1E40AF"/>
+            <a:srgbClr val="252525"/>
           </a:solidFill>
           <a:ln>
             <a:noFill/>
@@ -7491,7 +7547,7 @@
                   </a:txBody>
                   <a:tcPr>
                     <a:solidFill>
-                      <a:srgbClr val="1E40AF"/>
+                      <a:srgbClr val="1C1C1C"/>
                     </a:solidFill>
                   </a:tcPr>
                 </a:tc>
@@ -7513,7 +7569,7 @@
                   </a:txBody>
                   <a:tcPr>
                     <a:solidFill>
-                      <a:srgbClr val="1E40AF"/>
+                      <a:srgbClr val="1C1C1C"/>
                     </a:solidFill>
                   </a:tcPr>
                 </a:tc>
@@ -7528,7 +7584,7 @@
                       <a:r>
                         <a:rPr sz="1100">
                           <a:solidFill>
-                            <a:srgbClr val="1E293B"/>
+                            <a:srgbClr val="EEEEEE"/>
                           </a:solidFill>
                         </a:rPr>
                         <a:t>2・4（SNS画像・チラシ）</a:t>
@@ -7546,7 +7602,7 @@
                       <a:r>
                         <a:rPr sz="1100">
                           <a:solidFill>
-                            <a:srgbClr val="1E293B"/>
+                            <a:srgbClr val="EEEEEE"/>
                           </a:solidFill>
                         </a:rPr>
                         <a:t>Canvaのデザインテンプレート ＝ Canvaが用意している雛形を選んで編集する</a:t>
@@ -7566,7 +7622,7 @@
                       <a:r>
                         <a:rPr sz="1100">
                           <a:solidFill>
-                            <a:srgbClr val="1E293B"/>
+                            <a:srgbClr val="EEEEEE"/>
                           </a:solidFill>
                         </a:rPr>
                         <a:t>3（AI画像生成）</a:t>
@@ -7588,7 +7644,7 @@
                       <a:r>
                         <a:rPr sz="1100">
                           <a:solidFill>
-                            <a:srgbClr val="1E293B"/>
+                            <a:srgbClr val="EEEEEE"/>
                           </a:solidFill>
                         </a:rPr>
                         <a:t>プロンプトのひな型 ＝ 「[スタイル]の[主題]、[用途]向け」のような[ ]を埋めてMagic Mediaに入力する形式</a:t>
@@ -7697,7 +7753,7 @@
     <p:bg>
       <p:bgPr>
         <a:solidFill>
-          <a:srgbClr val="1E40AF"/>
+          <a:srgbClr val="1C1C1C"/>
         </a:solidFill>
         <a:effectLst/>
       </p:bgPr>
@@ -7846,7 +7902,7 @@
             <a:r>
               <a:rPr sz="1400" b="0" i="0">
                 <a:solidFill>
-                  <a:srgbClr val="93C5FD"/>
+                  <a:srgbClr val="DA7756"/>
                 </a:solidFill>
               </a:rPr>
               <a:t>[30分]</a:t>
@@ -7880,7 +7936,7 @@
             <a:r>
               <a:rPr sz="1500" b="0" i="0">
                 <a:solidFill>
-                  <a:srgbClr val="BFDBFE"/>
+                  <a:srgbClr val="B8A99A"/>
                 </a:solidFill>
               </a:rPr>
               <a:t>Canvaのデザインテンプレートで実践</a:t>
@@ -7899,6 +7955,14 @@
 <file path=ppt/slides/slide7.xml><?xml version="1.0" encoding="utf-8"?>
 <p:sld xmlns:a="http://schemas.openxmlformats.org/drawingml/2006/main" xmlns:p="http://schemas.openxmlformats.org/presentationml/2006/main" xmlns:r="http://schemas.openxmlformats.org/officeDocument/2006/relationships">
   <p:cSld>
+    <p:bg>
+      <p:bgPr>
+        <a:solidFill>
+          <a:srgbClr val="1C1C1C"/>
+        </a:solidFill>
+        <a:effectLst/>
+      </p:bgPr>
+    </p:bg>
     <p:spTree>
       <p:nvGrpSpPr>
         <p:cNvPr id="1" name=""/>
@@ -7921,7 +7985,7 @@
             <a:avLst/>
           </a:prstGeom>
           <a:solidFill>
-            <a:srgbClr val="1E40AF"/>
+            <a:srgbClr val="252525"/>
           </a:solidFill>
           <a:ln>
             <a:noFill/>
@@ -8009,7 +8073,7 @@
             <a:r>
               <a:rPr sz="1200" b="0" i="0">
                 <a:solidFill>
-                  <a:srgbClr val="93C5FD"/>
+                  <a:srgbClr val="DA7756"/>
                 </a:solidFill>
               </a:rPr>
               <a:t>[実践15分]</a:t>
@@ -8032,7 +8096,7 @@
             <a:avLst/>
           </a:prstGeom>
           <a:solidFill>
-            <a:srgbClr val="EFF6FF"/>
+            <a:srgbClr val="2F2F2F"/>
           </a:solidFill>
           <a:ln>
             <a:noFill/>
@@ -8086,7 +8150,7 @@
             <a:r>
               <a:rPr sz="1400" b="1" i="0">
                 <a:solidFill>
-                  <a:srgbClr val="1E293B"/>
+                  <a:srgbClr val="EEEEEE"/>
                 </a:solidFill>
               </a:rPr>
               <a:t>お題：自社のサービス・商品紹介の Instagram 投稿画像を1枚作る</a:t>
@@ -8136,7 +8200,7 @@
                   </a:txBody>
                   <a:tcPr>
                     <a:solidFill>
-                      <a:srgbClr val="1E40AF"/>
+                      <a:srgbClr val="1C1C1C"/>
                     </a:solidFill>
                   </a:tcPr>
                 </a:tc>
@@ -8158,7 +8222,7 @@
                   </a:txBody>
                   <a:tcPr>
                     <a:solidFill>
-                      <a:srgbClr val="1E40AF"/>
+                      <a:srgbClr val="1C1C1C"/>
                     </a:solidFill>
                   </a:tcPr>
                 </a:tc>
@@ -8180,7 +8244,7 @@
                   </a:txBody>
                   <a:tcPr>
                     <a:solidFill>
-                      <a:srgbClr val="1E40AF"/>
+                      <a:srgbClr val="1C1C1C"/>
                     </a:solidFill>
                   </a:tcPr>
                 </a:tc>
@@ -8195,7 +8259,7 @@
                       <a:r>
                         <a:rPr sz="1100">
                           <a:solidFill>
-                            <a:srgbClr val="1E293B"/>
+                            <a:srgbClr val="EEEEEE"/>
                           </a:solidFill>
                         </a:rPr>
                         <a:t>1</a:t>
@@ -8213,7 +8277,7 @@
                       <a:r>
                         <a:rPr sz="1100">
                           <a:solidFill>
-                            <a:srgbClr val="1E293B"/>
+                            <a:srgbClr val="EEEEEE"/>
                           </a:solidFill>
                         </a:rPr>
                         <a:t>「デザインを作成」→「Instagramの投稿（正方形）」を選択</a:t>
@@ -8231,7 +8295,7 @@
                       <a:r>
                         <a:rPr sz="1100">
                           <a:solidFill>
-                            <a:srgbClr val="1E293B"/>
+                            <a:srgbClr val="EEEEEE"/>
                           </a:solidFill>
                         </a:rPr>
                         <a:t>2分</a:t>
@@ -8251,7 +8315,7 @@
                       <a:r>
                         <a:rPr sz="1100">
                           <a:solidFill>
-                            <a:srgbClr val="1E293B"/>
+                            <a:srgbClr val="EEEEEE"/>
                           </a:solidFill>
                         </a:rPr>
                         <a:t>2</a:t>
@@ -8273,7 +8337,7 @@
                       <a:r>
                         <a:rPr sz="1100">
                           <a:solidFill>
-                            <a:srgbClr val="1E293B"/>
+                            <a:srgbClr val="EEEEEE"/>
                           </a:solidFill>
                         </a:rPr>
                         <a:t>テンプレートを検索・選択（業種・雰囲気で選ぶ）</a:t>
@@ -8295,7 +8359,7 @@
                       <a:r>
                         <a:rPr sz="1100">
                           <a:solidFill>
-                            <a:srgbClr val="1E293B"/>
+                            <a:srgbClr val="EEEEEE"/>
                           </a:solidFill>
                         </a:rPr>
                         <a:t>3分</a:t>
@@ -8319,7 +8383,7 @@
                       <a:r>
                         <a:rPr sz="1100">
                           <a:solidFill>
-                            <a:srgbClr val="1E293B"/>
+                            <a:srgbClr val="EEEEEE"/>
                           </a:solidFill>
                         </a:rPr>
                         <a:t>3</a:t>
@@ -8337,7 +8401,7 @@
                       <a:r>
                         <a:rPr sz="1100">
                           <a:solidFill>
-                            <a:srgbClr val="1E293B"/>
+                            <a:srgbClr val="EEEEEE"/>
                           </a:solidFill>
                         </a:rPr>
                         <a:t>テキストを自社の内容に書き換え・色やフォントを調整</a:t>
@@ -8355,7 +8419,7 @@
                       <a:r>
                         <a:rPr sz="1100">
                           <a:solidFill>
-                            <a:srgbClr val="1E293B"/>
+                            <a:srgbClr val="EEEEEE"/>
                           </a:solidFill>
                         </a:rPr>
                         <a:t>7分</a:t>
@@ -8375,7 +8439,7 @@
                       <a:r>
                         <a:rPr sz="1100">
                           <a:solidFill>
-                            <a:srgbClr val="1E293B"/>
+                            <a:srgbClr val="EEEEEE"/>
                           </a:solidFill>
                         </a:rPr>
                         <a:t>4</a:t>
@@ -8397,7 +8461,7 @@
                       <a:r>
                         <a:rPr sz="1100">
                           <a:solidFill>
-                            <a:srgbClr val="1E293B"/>
+                            <a:srgbClr val="EEEEEE"/>
                           </a:solidFill>
                         </a:rPr>
                         <a:t>ダウンロード（PNG）して確認</a:t>
@@ -8419,7 +8483,7 @@
                       <a:r>
                         <a:rPr sz="1100">
                           <a:solidFill>
-                            <a:srgbClr val="1E293B"/>
+                            <a:srgbClr val="EEEEEE"/>
                           </a:solidFill>
                         </a:rPr>
                         <a:t>3分</a:t>
@@ -8463,7 +8527,7 @@
             <a:r>
               <a:rPr sz="1300" b="1" i="0">
                 <a:solidFill>
-                  <a:srgbClr val="1E40AF"/>
+                  <a:srgbClr val="1C1C1C"/>
                 </a:solidFill>
               </a:rPr>
               <a:t>ポイント：テンプレートのレイアウトはそのままでOK。テキストと色だけ変えるだけで「自社らしい」デザインになります</a:t>
@@ -8482,6 +8546,14 @@
 <file path=ppt/slides/slide8.xml><?xml version="1.0" encoding="utf-8"?>
 <p:sld xmlns:a="http://schemas.openxmlformats.org/drawingml/2006/main" xmlns:p="http://schemas.openxmlformats.org/presentationml/2006/main" xmlns:r="http://schemas.openxmlformats.org/officeDocument/2006/relationships">
   <p:cSld>
+    <p:bg>
+      <p:bgPr>
+        <a:solidFill>
+          <a:srgbClr val="1C1C1C"/>
+        </a:solidFill>
+        <a:effectLst/>
+      </p:bgPr>
+    </p:bg>
     <p:spTree>
       <p:nvGrpSpPr>
         <p:cNvPr id="1" name=""/>
@@ -8504,7 +8576,7 @@
             <a:avLst/>
           </a:prstGeom>
           <a:solidFill>
-            <a:srgbClr val="1E40AF"/>
+            <a:srgbClr val="252525"/>
           </a:solidFill>
           <a:ln>
             <a:noFill/>
@@ -8592,7 +8664,7 @@
             <a:r>
               <a:rPr sz="1200" b="0" i="0">
                 <a:solidFill>
-                  <a:srgbClr val="93C5FD"/>
+                  <a:srgbClr val="DA7756"/>
                 </a:solidFill>
               </a:rPr>
               <a:t>[実践10分]</a:t>
@@ -8675,7 +8747,7 @@
                   </a:txBody>
                   <a:tcPr>
                     <a:solidFill>
-                      <a:srgbClr val="1E40AF"/>
+                      <a:srgbClr val="1C1C1C"/>
                     </a:solidFill>
                   </a:tcPr>
                 </a:tc>
@@ -8697,7 +8769,7 @@
                   </a:txBody>
                   <a:tcPr>
                     <a:solidFill>
-                      <a:srgbClr val="1E40AF"/>
+                      <a:srgbClr val="1C1C1C"/>
                     </a:solidFill>
                   </a:tcPr>
                 </a:tc>
@@ -8712,7 +8784,7 @@
                       <a:r>
                         <a:rPr sz="1100">
                           <a:solidFill>
-                            <a:srgbClr val="1E293B"/>
+                            <a:srgbClr val="EEEEEE"/>
                           </a:solidFill>
                         </a:rPr>
                         <a:t>Facebook投稿画像</a:t>
@@ -8730,7 +8802,7 @@
                       <a:r>
                         <a:rPr sz="1100">
                           <a:solidFill>
-                            <a:srgbClr val="1E293B"/>
+                            <a:srgbClr val="EEEEEE"/>
                           </a:solidFill>
                         </a:rPr>
                         <a:t>横長（1200×628px）でテンプレートを選択</a:t>
@@ -8750,7 +8822,7 @@
                       <a:r>
                         <a:rPr sz="1100">
                           <a:solidFill>
-                            <a:srgbClr val="1E293B"/>
+                            <a:srgbClr val="EEEEEE"/>
                           </a:solidFill>
                         </a:rPr>
                         <a:t>キャンペーン・セール告知</a:t>
@@ -8772,7 +8844,7 @@
                       <a:r>
                         <a:rPr sz="1100">
                           <a:solidFill>
-                            <a:srgbClr val="1E293B"/>
+                            <a:srgbClr val="EEEEEE"/>
                           </a:solidFill>
                         </a:rPr>
                         <a:t>「セール」「SALE」で検索するとバナー向きテンプレが出る</a:t>
@@ -8796,7 +8868,7 @@
                       <a:r>
                         <a:rPr sz="1100">
                           <a:solidFill>
-                            <a:srgbClr val="1E293B"/>
+                            <a:srgbClr val="EEEEEE"/>
                           </a:solidFill>
                         </a:rPr>
                         <a:t>季節のご挨拶画像</a:t>
@@ -8814,7 +8886,7 @@
                       <a:r>
                         <a:rPr sz="1100">
                           <a:solidFill>
-                            <a:srgbClr val="1E293B"/>
+                            <a:srgbClr val="EEEEEE"/>
                           </a:solidFill>
                         </a:rPr>
                         <a:t>「年末年始」「春」「夏」等で検索・差し替えるだけでOK</a:t>
@@ -8834,7 +8906,7 @@
                       <a:r>
                         <a:rPr sz="1100">
                           <a:solidFill>
-                            <a:srgbClr val="1E293B"/>
+                            <a:srgbClr val="EEEEEE"/>
                           </a:solidFill>
                         </a:rPr>
                         <a:t>お客様の声・事例紹介</a:t>
@@ -8856,7 +8928,7 @@
                       <a:r>
                         <a:rPr sz="1100">
                           <a:solidFill>
-                            <a:srgbClr val="1E293B"/>
+                            <a:srgbClr val="EEEEEE"/>
                           </a:solidFill>
                         </a:rPr>
                         <a:t>引用デザインのテンプレートを選んでテキスト差し替え</a:t>
@@ -8880,7 +8952,7 @@
                       <a:r>
                         <a:rPr sz="1100">
                           <a:solidFill>
-                            <a:srgbClr val="1E293B"/>
+                            <a:srgbClr val="EEEEEE"/>
                           </a:solidFill>
                         </a:rPr>
                         <a:t>LINE公式アカウント用バナー</a:t>
@@ -8898,7 +8970,7 @@
                       <a:r>
                         <a:rPr sz="1100">
                           <a:solidFill>
-                            <a:srgbClr val="1E293B"/>
+                            <a:srgbClr val="EEEEEE"/>
                           </a:solidFill>
                         </a:rPr>
                         <a:t>1200×600pxで作成・ダウンロードしてLINE管理画面でアップ</a:t>
@@ -8926,7 +8998,7 @@
     <p:bg>
       <p:bgPr>
         <a:solidFill>
-          <a:srgbClr val="1E40AF"/>
+          <a:srgbClr val="1C1C1C"/>
         </a:solidFill>
         <a:effectLst/>
       </p:bgPr>
@@ -9075,7 +9147,7 @@
             <a:r>
               <a:rPr sz="1400" b="0" i="0">
                 <a:solidFill>
-                  <a:srgbClr val="93C5FD"/>
+                  <a:srgbClr val="DA7756"/>
                 </a:solidFill>
               </a:rPr>
               <a:t>[30分]</a:t>
@@ -9109,7 +9181,7 @@
             <a:r>
               <a:rPr sz="1500" b="0" i="0">
                 <a:solidFill>
-                  <a:srgbClr val="BFDBFE"/>
+                  <a:srgbClr val="B8A99A"/>
                 </a:solidFill>
               </a:rPr>
               <a:t>Magic Mediaでテキストから画像を生成する</a:t>

--- a/00-01_han-ai/training-materials/course03_jissen_gazo.pptx
+++ b/00-01_han-ai/training-materials/course03_jissen_gazo.pptx
@@ -3476,9 +3476,7 @@
         <a:graphic>
           <a:graphicData uri="http://schemas.openxmlformats.org/drawingml/2006/table">
             <a:tbl>
-              <a:tblPr firstRow="1" bandRow="1">
-                <a:tableStyleId>{5C22544A-7EE6-4342-B048-85BDC9FD1C3A}</a:tableStyleId>
-              </a:tblPr>
+              <a:tblPr/>
               <a:tblGrid>
                 <a:gridCol w="2304288"/>
                 <a:gridCol w="5925312"/>
@@ -4094,9 +4092,7 @@
         <a:graphic>
           <a:graphicData uri="http://schemas.openxmlformats.org/drawingml/2006/table">
             <a:tbl>
-              <a:tblPr firstRow="1" bandRow="1">
-                <a:tableStyleId>{5C22544A-7EE6-4342-B048-85BDC9FD1C3A}</a:tableStyleId>
-              </a:tblPr>
+              <a:tblPr/>
               <a:tblGrid>
                 <a:gridCol w="2880360"/>
                 <a:gridCol w="5349240"/>
@@ -4770,9 +4766,7 @@
         <a:graphic>
           <a:graphicData uri="http://schemas.openxmlformats.org/drawingml/2006/table">
             <a:tbl>
-              <a:tblPr firstRow="1" bandRow="1">
-                <a:tableStyleId>{5C22544A-7EE6-4342-B048-85BDC9FD1C3A}</a:tableStyleId>
-              </a:tblPr>
+              <a:tblPr/>
               <a:tblGrid>
                 <a:gridCol w="576072"/>
                 <a:gridCol w="6007608"/>
@@ -5734,9 +5728,7 @@
         <a:graphic>
           <a:graphicData uri="http://schemas.openxmlformats.org/drawingml/2006/table">
             <a:tbl>
-              <a:tblPr firstRow="1" bandRow="1">
-                <a:tableStyleId>{5C22544A-7EE6-4342-B048-85BDC9FD1C3A}</a:tableStyleId>
-              </a:tblPr>
+              <a:tblPr/>
               <a:tblGrid>
                 <a:gridCol w="2057400"/>
                 <a:gridCol w="6172200"/>
@@ -6192,9 +6184,7 @@
         <a:graphic>
           <a:graphicData uri="http://schemas.openxmlformats.org/drawingml/2006/table">
             <a:tbl>
-              <a:tblPr firstRow="1" bandRow="1">
-                <a:tableStyleId>{5C22544A-7EE6-4342-B048-85BDC9FD1C3A}</a:tableStyleId>
-              </a:tblPr>
+              <a:tblPr/>
               <a:tblGrid>
                 <a:gridCol w="493776"/>
                 <a:gridCol w="1810512"/>
@@ -7144,9 +7134,7 @@
         <a:graphic>
           <a:graphicData uri="http://schemas.openxmlformats.org/drawingml/2006/table">
             <a:tbl>
-              <a:tblPr firstRow="1" bandRow="1">
-                <a:tableStyleId>{5C22544A-7EE6-4342-B048-85BDC9FD1C3A}</a:tableStyleId>
-              </a:tblPr>
+              <a:tblPr/>
               <a:tblGrid>
                 <a:gridCol w="2057400"/>
                 <a:gridCol w="6172200"/>
@@ -7521,9 +7509,7 @@
         <a:graphic>
           <a:graphicData uri="http://schemas.openxmlformats.org/drawingml/2006/table">
             <a:tbl>
-              <a:tblPr firstRow="1" bandRow="1">
-                <a:tableStyleId>{5C22544A-7EE6-4342-B048-85BDC9FD1C3A}</a:tableStyleId>
-              </a:tblPr>
+              <a:tblPr/>
               <a:tblGrid>
                 <a:gridCol w="2468880"/>
                 <a:gridCol w="5760720"/>
@@ -8173,9 +8159,7 @@
         <a:graphic>
           <a:graphicData uri="http://schemas.openxmlformats.org/drawingml/2006/table">
             <a:tbl>
-              <a:tblPr firstRow="1" bandRow="1">
-                <a:tableStyleId>{5C22544A-7EE6-4342-B048-85BDC9FD1C3A}</a:tableStyleId>
-              </a:tblPr>
+              <a:tblPr/>
               <a:tblGrid>
                 <a:gridCol w="576072"/>
                 <a:gridCol w="6007608"/>
@@ -8721,9 +8705,7 @@
         <a:graphic>
           <a:graphicData uri="http://schemas.openxmlformats.org/drawingml/2006/table">
             <a:tbl>
-              <a:tblPr firstRow="1" bandRow="1">
-                <a:tableStyleId>{5C22544A-7EE6-4342-B048-85BDC9FD1C3A}</a:tableStyleId>
-              </a:tblPr>
+              <a:tblPr/>
               <a:tblGrid>
                 <a:gridCol w="2468880"/>
                 <a:gridCol w="5760720"/>

--- a/00-01_han-ai/training-materials/course03_jissen_gazo.pptx
+++ b/00-01_han-ai/training-materials/course03_jissen_gazo.pptx
@@ -124,6 +124,14 @@
 
 <file path=ppt/slideLayouts/slideLayout1.xml><?xml version="1.0" encoding="utf-8"?>
 <p:sldLayout xmlns:a="http://schemas.openxmlformats.org/drawingml/2006/main" xmlns:r="http://schemas.openxmlformats.org/officeDocument/2006/relationships" xmlns:p="http://schemas.openxmlformats.org/presentationml/2006/main" type="title" preserve="1">
+  <p:bg>
+    <p:bgPr>
+      <a:solidFill>
+        <a:srgbClr val="1C1C1C"/>
+      </a:solidFill>
+      <a:effectLst/>
+    </p:bgPr>
+  </p:bg>
   <p:cSld name="Title Slide">
     <p:spTree>
       <p:nvGrpSpPr>
@@ -366,6 +374,14 @@
 
 <file path=ppt/slideLayouts/slideLayout10.xml><?xml version="1.0" encoding="utf-8"?>
 <p:sldLayout xmlns:a="http://schemas.openxmlformats.org/drawingml/2006/main" xmlns:r="http://schemas.openxmlformats.org/officeDocument/2006/relationships" xmlns:p="http://schemas.openxmlformats.org/presentationml/2006/main" type="vertTx" preserve="1">
+  <p:bg>
+    <p:bgPr>
+      <a:solidFill>
+        <a:srgbClr val="1C1C1C"/>
+      </a:solidFill>
+      <a:effectLst/>
+    </p:bgPr>
+  </p:bg>
   <p:cSld name="Title and Vertical Text">
     <p:spTree>
       <p:nvGrpSpPr>
@@ -536,6 +552,14 @@
 
 <file path=ppt/slideLayouts/slideLayout11.xml><?xml version="1.0" encoding="utf-8"?>
 <p:sldLayout xmlns:a="http://schemas.openxmlformats.org/drawingml/2006/main" xmlns:r="http://schemas.openxmlformats.org/officeDocument/2006/relationships" xmlns:p="http://schemas.openxmlformats.org/presentationml/2006/main" type="vertTitleAndTx" preserve="1">
+  <p:bg>
+    <p:bgPr>
+      <a:solidFill>
+        <a:srgbClr val="1C1C1C"/>
+      </a:solidFill>
+      <a:effectLst/>
+    </p:bgPr>
+  </p:bg>
   <p:cSld name="Vertical Title and Text">
     <p:spTree>
       <p:nvGrpSpPr>
@@ -716,6 +740,14 @@
 
 <file path=ppt/slideLayouts/slideLayout2.xml><?xml version="1.0" encoding="utf-8"?>
 <p:sldLayout xmlns:a="http://schemas.openxmlformats.org/drawingml/2006/main" xmlns:r="http://schemas.openxmlformats.org/officeDocument/2006/relationships" xmlns:p="http://schemas.openxmlformats.org/presentationml/2006/main" type="obj" preserve="1">
+  <p:bg>
+    <p:bgPr>
+      <a:solidFill>
+        <a:srgbClr val="1C1C1C"/>
+      </a:solidFill>
+      <a:effectLst/>
+    </p:bgPr>
+  </p:bg>
   <p:cSld name="Title and Content">
     <p:spTree>
       <p:nvGrpSpPr>
@@ -886,6 +918,14 @@
 
 <file path=ppt/slideLayouts/slideLayout3.xml><?xml version="1.0" encoding="utf-8"?>
 <p:sldLayout xmlns:a="http://schemas.openxmlformats.org/drawingml/2006/main" xmlns:r="http://schemas.openxmlformats.org/officeDocument/2006/relationships" xmlns:p="http://schemas.openxmlformats.org/presentationml/2006/main" type="secHead" preserve="1">
+  <p:bg>
+    <p:bgPr>
+      <a:solidFill>
+        <a:srgbClr val="1C1C1C"/>
+      </a:solidFill>
+      <a:effectLst/>
+    </p:bgPr>
+  </p:bg>
   <p:cSld name="Section Header">
     <p:spTree>
       <p:nvGrpSpPr>
@@ -1132,6 +1172,14 @@
 
 <file path=ppt/slideLayouts/slideLayout4.xml><?xml version="1.0" encoding="utf-8"?>
 <p:sldLayout xmlns:a="http://schemas.openxmlformats.org/drawingml/2006/main" xmlns:r="http://schemas.openxmlformats.org/officeDocument/2006/relationships" xmlns:p="http://schemas.openxmlformats.org/presentationml/2006/main" type="twoObj" preserve="1">
+  <p:bg>
+    <p:bgPr>
+      <a:solidFill>
+        <a:srgbClr val="1C1C1C"/>
+      </a:solidFill>
+      <a:effectLst/>
+    </p:bgPr>
+  </p:bg>
   <p:cSld name="Two Content">
     <p:spTree>
       <p:nvGrpSpPr>
@@ -1420,6 +1468,14 @@
 
 <file path=ppt/slideLayouts/slideLayout5.xml><?xml version="1.0" encoding="utf-8"?>
 <p:sldLayout xmlns:a="http://schemas.openxmlformats.org/drawingml/2006/main" xmlns:r="http://schemas.openxmlformats.org/officeDocument/2006/relationships" xmlns:p="http://schemas.openxmlformats.org/presentationml/2006/main" type="twoTxTwoObj" preserve="1">
+  <p:bg>
+    <p:bgPr>
+      <a:solidFill>
+        <a:srgbClr val="1C1C1C"/>
+      </a:solidFill>
+      <a:effectLst/>
+    </p:bgPr>
+  </p:bg>
   <p:cSld name="Comparison">
     <p:spTree>
       <p:nvGrpSpPr>
@@ -1842,6 +1898,14 @@
 
 <file path=ppt/slideLayouts/slideLayout6.xml><?xml version="1.0" encoding="utf-8"?>
 <p:sldLayout xmlns:a="http://schemas.openxmlformats.org/drawingml/2006/main" xmlns:r="http://schemas.openxmlformats.org/officeDocument/2006/relationships" xmlns:p="http://schemas.openxmlformats.org/presentationml/2006/main" type="titleOnly" preserve="1">
+  <p:bg>
+    <p:bgPr>
+      <a:solidFill>
+        <a:srgbClr val="1C1C1C"/>
+      </a:solidFill>
+      <a:effectLst/>
+    </p:bgPr>
+  </p:bg>
   <p:cSld name="Title Only">
     <p:spTree>
       <p:nvGrpSpPr>
@@ -1960,6 +2024,14 @@
 
 <file path=ppt/slideLayouts/slideLayout7.xml><?xml version="1.0" encoding="utf-8"?>
 <p:sldLayout xmlns:a="http://schemas.openxmlformats.org/drawingml/2006/main" xmlns:r="http://schemas.openxmlformats.org/officeDocument/2006/relationships" xmlns:p="http://schemas.openxmlformats.org/presentationml/2006/main" type="blank" preserve="1">
+  <p:bg>
+    <p:bgPr>
+      <a:solidFill>
+        <a:srgbClr val="1C1C1C"/>
+      </a:solidFill>
+      <a:effectLst/>
+    </p:bgPr>
+  </p:bg>
   <p:cSld name="Blank">
     <p:spTree>
       <p:nvGrpSpPr>
@@ -2055,6 +2127,14 @@
 
 <file path=ppt/slideLayouts/slideLayout8.xml><?xml version="1.0" encoding="utf-8"?>
 <p:sldLayout xmlns:a="http://schemas.openxmlformats.org/drawingml/2006/main" xmlns:r="http://schemas.openxmlformats.org/officeDocument/2006/relationships" xmlns:p="http://schemas.openxmlformats.org/presentationml/2006/main" type="objTx" preserve="1">
+  <p:bg>
+    <p:bgPr>
+      <a:solidFill>
+        <a:srgbClr val="1C1C1C"/>
+      </a:solidFill>
+      <a:effectLst/>
+    </p:bgPr>
+  </p:bg>
   <p:cSld name="Content with Caption">
     <p:spTree>
       <p:nvGrpSpPr>
@@ -2332,6 +2412,14 @@
 
 <file path=ppt/slideLayouts/slideLayout9.xml><?xml version="1.0" encoding="utf-8"?>
 <p:sldLayout xmlns:a="http://schemas.openxmlformats.org/drawingml/2006/main" xmlns:r="http://schemas.openxmlformats.org/officeDocument/2006/relationships" xmlns:p="http://schemas.openxmlformats.org/presentationml/2006/main" type="picTx" preserve="1">
+  <p:bg>
+    <p:bgPr>
+      <a:solidFill>
+        <a:srgbClr val="1C1C1C"/>
+      </a:solidFill>
+      <a:effectLst/>
+    </p:bgPr>
+  </p:bg>
   <p:cSld name="Picture with Caption">
     <p:spTree>
       <p:nvGrpSpPr>
@@ -2587,9 +2675,12 @@
 <p:sldMaster xmlns:a="http://schemas.openxmlformats.org/drawingml/2006/main" xmlns:r="http://schemas.openxmlformats.org/officeDocument/2006/relationships" xmlns:p="http://schemas.openxmlformats.org/presentationml/2006/main">
   <p:cSld>
     <p:bg>
-      <p:bgRef idx="1001">
-        <a:schemeClr val="bg1"/>
-      </p:bgRef>
+      <p:bgPr>
+        <a:solidFill>
+          <a:srgbClr val="1C1C1C"/>
+        </a:solidFill>
+        <a:effectLst/>
+      </p:bgPr>
     </p:bg>
     <p:spTree>
       <p:nvGrpSpPr>
@@ -2826,7 +2917,7 @@
       </p:ext>
     </p:extLst>
   </p:cSld>
-  <p:clrMap bg1="lt1" tx1="dk1" bg2="lt2" tx2="dk2" accent1="accent1" accent2="accent2" accent3="accent3" accent4="accent4" accent5="accent5" accent6="accent6" hlink="hlink" folHlink="folHlink"/>
+  <p:clrMap bg1="dk1" tx1="dk1" bg2="lt2" tx2="dk2" accent1="accent1" accent2="accent2" accent3="accent3" accent4="accent4" accent5="accent5" accent6="accent6" hlink="hlink" folHlink="folHlink"/>
   <p:sldLayoutIdLst>
     <p:sldLayoutId id="2147483649" r:id="rId1"/>
     <p:sldLayoutId id="2147483650" r:id="rId2"/>
@@ -9190,13 +9281,13 @@
         <a:sysClr val="window" lastClr="FFFFFF"/>
       </a:lt1>
       <a:dk2>
-        <a:srgbClr val="1F497D"/>
+        <a:srgbClr val="252525"/>
       </a:dk2>
       <a:lt2>
         <a:srgbClr val="EEECE1"/>
       </a:lt2>
       <a:accent1>
-        <a:srgbClr val="4F81BD"/>
+        <a:srgbClr val="DA7756"/>
       </a:accent1>
       <a:accent2>
         <a:srgbClr val="C0504D"/>

--- a/00-01_han-ai/training-materials/course03_jissen_gazo.pptx
+++ b/00-01_han-ai/training-materials/course03_jissen_gazo.pptx
@@ -3202,6 +3202,35 @@
         <p:nvPr/>
       </p:nvGrpSpPr>
       <p:grpSpPr/>
+      <p:sp xmlns:a="http://schemas.openxmlformats.org/drawingml/2006/main" xmlns:p="http://schemas.openxmlformats.org/presentationml/2006/main">
+        <p:nvSpPr>
+          <p:cNvPr id="9900" name="_BG_DARK_"/>
+          <p:cNvSpPr>
+            <a:spLocks noSelect="1" noMove="1" noResize="1"/>
+          </p:cNvSpPr>
+          <p:nvPr/>
+        </p:nvSpPr>
+        <p:spPr>
+          <a:xfrm>
+            <a:off x="0" y="0"/>
+            <a:ext cx="9144000" cy="5143500"/>
+          </a:xfrm>
+          <a:prstGeom prst="rect">
+            <a:avLst/>
+          </a:prstGeom>
+          <a:solidFill>
+            <a:srgbClr val="1C1C1C"/>
+          </a:solidFill>
+          <a:ln>
+            <a:noFill/>
+          </a:ln>
+        </p:spPr>
+        <p:txBody>
+          <a:bodyPr/>
+          <a:lstStyle/>
+          <a:p/>
+        </p:txBody>
+      </p:sp>
       <p:sp>
         <p:nvSpPr>
           <p:cNvPr id="2" name="Rectangle 1"/>
@@ -3441,6 +3470,35 @@
         <p:nvPr/>
       </p:nvGrpSpPr>
       <p:grpSpPr/>
+      <p:sp xmlns:a="http://schemas.openxmlformats.org/drawingml/2006/main" xmlns:p="http://schemas.openxmlformats.org/presentationml/2006/main">
+        <p:nvSpPr>
+          <p:cNvPr id="9900" name="_BG_DARK_"/>
+          <p:cNvSpPr>
+            <a:spLocks noSelect="1" noMove="1" noResize="1"/>
+          </p:cNvSpPr>
+          <p:nvPr/>
+        </p:nvSpPr>
+        <p:spPr>
+          <a:xfrm>
+            <a:off x="0" y="0"/>
+            <a:ext cx="9144000" cy="5143500"/>
+          </a:xfrm>
+          <a:prstGeom prst="rect">
+            <a:avLst/>
+          </a:prstGeom>
+          <a:solidFill>
+            <a:srgbClr val="1C1C1C"/>
+          </a:solidFill>
+          <a:ln>
+            <a:noFill/>
+          </a:ln>
+        </p:spPr>
+        <p:txBody>
+          <a:bodyPr/>
+          <a:lstStyle/>
+          <a:p/>
+        </p:txBody>
+      </p:sp>
       <p:sp>
         <p:nvSpPr>
           <p:cNvPr id="2" name="Rectangle 1"/>
@@ -3931,6 +3989,35 @@
         <p:nvPr/>
       </p:nvGrpSpPr>
       <p:grpSpPr/>
+      <p:sp xmlns:a="http://schemas.openxmlformats.org/drawingml/2006/main" xmlns:p="http://schemas.openxmlformats.org/presentationml/2006/main">
+        <p:nvSpPr>
+          <p:cNvPr id="9900" name="_BG_DARK_"/>
+          <p:cNvSpPr>
+            <a:spLocks noSelect="1" noMove="1" noResize="1"/>
+          </p:cNvSpPr>
+          <p:nvPr/>
+        </p:nvSpPr>
+        <p:spPr>
+          <a:xfrm>
+            <a:off x="0" y="0"/>
+            <a:ext cx="9144000" cy="5143500"/>
+          </a:xfrm>
+          <a:prstGeom prst="rect">
+            <a:avLst/>
+          </a:prstGeom>
+          <a:solidFill>
+            <a:srgbClr val="1C1C1C"/>
+          </a:solidFill>
+          <a:ln>
+            <a:noFill/>
+          </a:ln>
+        </p:spPr>
+        <p:txBody>
+          <a:bodyPr/>
+          <a:lstStyle/>
+          <a:p/>
+        </p:txBody>
+      </p:sp>
       <p:sp>
         <p:nvSpPr>
           <p:cNvPr id="2" name="Rectangle 1"/>
@@ -4432,6 +4519,35 @@
         <p:nvPr/>
       </p:nvGrpSpPr>
       <p:grpSpPr/>
+      <p:sp xmlns:a="http://schemas.openxmlformats.org/drawingml/2006/main" xmlns:p="http://schemas.openxmlformats.org/presentationml/2006/main">
+        <p:nvSpPr>
+          <p:cNvPr id="9900" name="_BG_DARK_"/>
+          <p:cNvSpPr>
+            <a:spLocks noSelect="1" noMove="1" noResize="1"/>
+          </p:cNvSpPr>
+          <p:nvPr/>
+        </p:nvSpPr>
+        <p:spPr>
+          <a:xfrm>
+            <a:off x="0" y="0"/>
+            <a:ext cx="9144000" cy="5143500"/>
+          </a:xfrm>
+          <a:prstGeom prst="rect">
+            <a:avLst/>
+          </a:prstGeom>
+          <a:solidFill>
+            <a:srgbClr val="1C1C1C"/>
+          </a:solidFill>
+          <a:ln>
+            <a:noFill/>
+          </a:ln>
+        </p:spPr>
+        <p:txBody>
+          <a:bodyPr/>
+          <a:lstStyle/>
+          <a:p/>
+        </p:txBody>
+      </p:sp>
       <p:sp>
         <p:nvSpPr>
           <p:cNvPr id="2" name="TextBox 1"/>
@@ -4526,6 +4642,35 @@
         <p:nvPr/>
       </p:nvGrpSpPr>
       <p:grpSpPr/>
+      <p:sp xmlns:a="http://schemas.openxmlformats.org/drawingml/2006/main" xmlns:p="http://schemas.openxmlformats.org/presentationml/2006/main">
+        <p:nvSpPr>
+          <p:cNvPr id="9900" name="_BG_DARK_"/>
+          <p:cNvSpPr>
+            <a:spLocks noSelect="1" noMove="1" noResize="1"/>
+          </p:cNvSpPr>
+          <p:nvPr/>
+        </p:nvSpPr>
+        <p:spPr>
+          <a:xfrm>
+            <a:off x="0" y="0"/>
+            <a:ext cx="9144000" cy="5143500"/>
+          </a:xfrm>
+          <a:prstGeom prst="rect">
+            <a:avLst/>
+          </a:prstGeom>
+          <a:solidFill>
+            <a:srgbClr val="1C1C1C"/>
+          </a:solidFill>
+          <a:ln>
+            <a:noFill/>
+          </a:ln>
+        </p:spPr>
+        <p:txBody>
+          <a:bodyPr/>
+          <a:lstStyle/>
+          <a:p/>
+        </p:txBody>
+      </p:sp>
       <p:sp>
         <p:nvSpPr>
           <p:cNvPr id="2" name="Rectangle 1"/>
@@ -4731,6 +4876,35 @@
         <p:nvPr/>
       </p:nvGrpSpPr>
       <p:grpSpPr/>
+      <p:sp xmlns:a="http://schemas.openxmlformats.org/drawingml/2006/main" xmlns:p="http://schemas.openxmlformats.org/presentationml/2006/main">
+        <p:nvSpPr>
+          <p:cNvPr id="9900" name="_BG_DARK_"/>
+          <p:cNvSpPr>
+            <a:spLocks noSelect="1" noMove="1" noResize="1"/>
+          </p:cNvSpPr>
+          <p:nvPr/>
+        </p:nvSpPr>
+        <p:spPr>
+          <a:xfrm>
+            <a:off x="0" y="0"/>
+            <a:ext cx="9144000" cy="5143500"/>
+          </a:xfrm>
+          <a:prstGeom prst="rect">
+            <a:avLst/>
+          </a:prstGeom>
+          <a:solidFill>
+            <a:srgbClr val="1C1C1C"/>
+          </a:solidFill>
+          <a:ln>
+            <a:noFill/>
+          </a:ln>
+        </p:spPr>
+        <p:txBody>
+          <a:bodyPr/>
+          <a:lstStyle/>
+          <a:p/>
+        </p:txBody>
+      </p:sp>
       <p:sp>
         <p:nvSpPr>
           <p:cNvPr id="2" name="Rectangle 1"/>
@@ -5488,6 +5662,35 @@
         <p:nvPr/>
       </p:nvGrpSpPr>
       <p:grpSpPr/>
+      <p:sp xmlns:a="http://schemas.openxmlformats.org/drawingml/2006/main" xmlns:p="http://schemas.openxmlformats.org/presentationml/2006/main">
+        <p:nvSpPr>
+          <p:cNvPr id="9900" name="_BG_DARK_"/>
+          <p:cNvSpPr>
+            <a:spLocks noSelect="1" noMove="1" noResize="1"/>
+          </p:cNvSpPr>
+          <p:nvPr/>
+        </p:nvSpPr>
+        <p:spPr>
+          <a:xfrm>
+            <a:off x="0" y="0"/>
+            <a:ext cx="9144000" cy="5143500"/>
+          </a:xfrm>
+          <a:prstGeom prst="rect">
+            <a:avLst/>
+          </a:prstGeom>
+          <a:solidFill>
+            <a:srgbClr val="1C1C1C"/>
+          </a:solidFill>
+          <a:ln>
+            <a:noFill/>
+          </a:ln>
+        </p:spPr>
+        <p:txBody>
+          <a:bodyPr/>
+          <a:lstStyle/>
+          <a:p/>
+        </p:txBody>
+      </p:sp>
       <p:sp>
         <p:nvSpPr>
           <p:cNvPr id="2" name="Rectangle 1"/>
@@ -5693,6 +5896,35 @@
         <p:nvPr/>
       </p:nvGrpSpPr>
       <p:grpSpPr/>
+      <p:sp xmlns:a="http://schemas.openxmlformats.org/drawingml/2006/main" xmlns:p="http://schemas.openxmlformats.org/presentationml/2006/main">
+        <p:nvSpPr>
+          <p:cNvPr id="9900" name="_BG_DARK_"/>
+          <p:cNvSpPr>
+            <a:spLocks noSelect="1" noMove="1" noResize="1"/>
+          </p:cNvSpPr>
+          <p:nvPr/>
+        </p:nvSpPr>
+        <p:spPr>
+          <a:xfrm>
+            <a:off x="0" y="0"/>
+            <a:ext cx="9144000" cy="5143500"/>
+          </a:xfrm>
+          <a:prstGeom prst="rect">
+            <a:avLst/>
+          </a:prstGeom>
+          <a:solidFill>
+            <a:srgbClr val="1C1C1C"/>
+          </a:solidFill>
+          <a:ln>
+            <a:noFill/>
+          </a:ln>
+        </p:spPr>
+        <p:txBody>
+          <a:bodyPr/>
+          <a:lstStyle/>
+          <a:p/>
+        </p:txBody>
+      </p:sp>
       <p:sp>
         <p:nvSpPr>
           <p:cNvPr id="2" name="Rectangle 1"/>
@@ -6183,6 +6415,35 @@
         <p:nvPr/>
       </p:nvGrpSpPr>
       <p:grpSpPr/>
+      <p:sp xmlns:a="http://schemas.openxmlformats.org/drawingml/2006/main" xmlns:p="http://schemas.openxmlformats.org/presentationml/2006/main">
+        <p:nvSpPr>
+          <p:cNvPr id="9900" name="_BG_DARK_"/>
+          <p:cNvSpPr>
+            <a:spLocks noSelect="1" noMove="1" noResize="1"/>
+          </p:cNvSpPr>
+          <p:nvPr/>
+        </p:nvSpPr>
+        <p:spPr>
+          <a:xfrm>
+            <a:off x="0" y="0"/>
+            <a:ext cx="9144000" cy="5143500"/>
+          </a:xfrm>
+          <a:prstGeom prst="rect">
+            <a:avLst/>
+          </a:prstGeom>
+          <a:solidFill>
+            <a:srgbClr val="1C1C1C"/>
+          </a:solidFill>
+          <a:ln>
+            <a:noFill/>
+          </a:ln>
+        </p:spPr>
+        <p:txBody>
+          <a:bodyPr/>
+          <a:lstStyle/>
+          <a:p/>
+        </p:txBody>
+      </p:sp>
       <p:sp>
         <p:nvSpPr>
           <p:cNvPr id="2" name="Rectangle 1"/>
@@ -6894,6 +7155,35 @@
         <p:nvPr/>
       </p:nvGrpSpPr>
       <p:grpSpPr/>
+      <p:sp xmlns:a="http://schemas.openxmlformats.org/drawingml/2006/main" xmlns:p="http://schemas.openxmlformats.org/presentationml/2006/main">
+        <p:nvSpPr>
+          <p:cNvPr id="9900" name="_BG_DARK_"/>
+          <p:cNvSpPr>
+            <a:spLocks noSelect="1" noMove="1" noResize="1"/>
+          </p:cNvSpPr>
+          <p:nvPr/>
+        </p:nvSpPr>
+        <p:spPr>
+          <a:xfrm>
+            <a:off x="0" y="0"/>
+            <a:ext cx="9144000" cy="5143500"/>
+          </a:xfrm>
+          <a:prstGeom prst="rect">
+            <a:avLst/>
+          </a:prstGeom>
+          <a:solidFill>
+            <a:srgbClr val="1C1C1C"/>
+          </a:solidFill>
+          <a:ln>
+            <a:noFill/>
+          </a:ln>
+        </p:spPr>
+        <p:txBody>
+          <a:bodyPr/>
+          <a:lstStyle/>
+          <a:p/>
+        </p:txBody>
+      </p:sp>
       <p:sp>
         <p:nvSpPr>
           <p:cNvPr id="2" name="Rectangle 1"/>
@@ -7099,6 +7389,35 @@
         <p:nvPr/>
       </p:nvGrpSpPr>
       <p:grpSpPr/>
+      <p:sp xmlns:a="http://schemas.openxmlformats.org/drawingml/2006/main" xmlns:p="http://schemas.openxmlformats.org/presentationml/2006/main">
+        <p:nvSpPr>
+          <p:cNvPr id="9900" name="_BG_DARK_"/>
+          <p:cNvSpPr>
+            <a:spLocks noSelect="1" noMove="1" noResize="1"/>
+          </p:cNvSpPr>
+          <p:nvPr/>
+        </p:nvSpPr>
+        <p:spPr>
+          <a:xfrm>
+            <a:off x="0" y="0"/>
+            <a:ext cx="9144000" cy="5143500"/>
+          </a:xfrm>
+          <a:prstGeom prst="rect">
+            <a:avLst/>
+          </a:prstGeom>
+          <a:solidFill>
+            <a:srgbClr val="1C1C1C"/>
+          </a:solidFill>
+          <a:ln>
+            <a:noFill/>
+          </a:ln>
+        </p:spPr>
+        <p:txBody>
+          <a:bodyPr/>
+          <a:lstStyle/>
+          <a:p/>
+        </p:txBody>
+      </p:sp>
       <p:sp>
         <p:nvSpPr>
           <p:cNvPr id="2" name="Rectangle 1"/>
@@ -7508,6 +7827,35 @@
         <p:nvPr/>
       </p:nvGrpSpPr>
       <p:grpSpPr/>
+      <p:sp xmlns:a="http://schemas.openxmlformats.org/drawingml/2006/main" xmlns:p="http://schemas.openxmlformats.org/presentationml/2006/main">
+        <p:nvSpPr>
+          <p:cNvPr id="9900" name="_BG_DARK_"/>
+          <p:cNvSpPr>
+            <a:spLocks noSelect="1" noMove="1" noResize="1"/>
+          </p:cNvSpPr>
+          <p:nvPr/>
+        </p:nvSpPr>
+        <p:spPr>
+          <a:xfrm>
+            <a:off x="0" y="0"/>
+            <a:ext cx="9144000" cy="5143500"/>
+          </a:xfrm>
+          <a:prstGeom prst="rect">
+            <a:avLst/>
+          </a:prstGeom>
+          <a:solidFill>
+            <a:srgbClr val="1C1C1C"/>
+          </a:solidFill>
+          <a:ln>
+            <a:noFill/>
+          </a:ln>
+        </p:spPr>
+        <p:txBody>
+          <a:bodyPr/>
+          <a:lstStyle/>
+          <a:p/>
+        </p:txBody>
+      </p:sp>
       <p:sp>
         <p:nvSpPr>
           <p:cNvPr id="2" name="Rectangle 1"/>
@@ -7842,6 +8190,35 @@
         <p:nvPr/>
       </p:nvGrpSpPr>
       <p:grpSpPr/>
+      <p:sp xmlns:a="http://schemas.openxmlformats.org/drawingml/2006/main" xmlns:p="http://schemas.openxmlformats.org/presentationml/2006/main">
+        <p:nvSpPr>
+          <p:cNvPr id="9900" name="_BG_DARK_"/>
+          <p:cNvSpPr>
+            <a:spLocks noSelect="1" noMove="1" noResize="1"/>
+          </p:cNvSpPr>
+          <p:nvPr/>
+        </p:nvSpPr>
+        <p:spPr>
+          <a:xfrm>
+            <a:off x="0" y="0"/>
+            <a:ext cx="9144000" cy="5143500"/>
+          </a:xfrm>
+          <a:prstGeom prst="rect">
+            <a:avLst/>
+          </a:prstGeom>
+          <a:solidFill>
+            <a:srgbClr val="1C1C1C"/>
+          </a:solidFill>
+          <a:ln>
+            <a:noFill/>
+          </a:ln>
+        </p:spPr>
+        <p:txBody>
+          <a:bodyPr/>
+          <a:lstStyle/>
+          <a:p/>
+        </p:txBody>
+      </p:sp>
       <p:sp>
         <p:nvSpPr>
           <p:cNvPr id="2" name="Rectangle 1"/>
@@ -8047,6 +8424,35 @@
         <p:nvPr/>
       </p:nvGrpSpPr>
       <p:grpSpPr/>
+      <p:sp xmlns:a="http://schemas.openxmlformats.org/drawingml/2006/main" xmlns:p="http://schemas.openxmlformats.org/presentationml/2006/main">
+        <p:nvSpPr>
+          <p:cNvPr id="9900" name="_BG_DARK_"/>
+          <p:cNvSpPr>
+            <a:spLocks noSelect="1" noMove="1" noResize="1"/>
+          </p:cNvSpPr>
+          <p:nvPr/>
+        </p:nvSpPr>
+        <p:spPr>
+          <a:xfrm>
+            <a:off x="0" y="0"/>
+            <a:ext cx="9144000" cy="5143500"/>
+          </a:xfrm>
+          <a:prstGeom prst="rect">
+            <a:avLst/>
+          </a:prstGeom>
+          <a:solidFill>
+            <a:srgbClr val="1C1C1C"/>
+          </a:solidFill>
+          <a:ln>
+            <a:noFill/>
+          </a:ln>
+        </p:spPr>
+        <p:txBody>
+          <a:bodyPr/>
+          <a:lstStyle/>
+          <a:p/>
+        </p:txBody>
+      </p:sp>
       <p:sp>
         <p:nvSpPr>
           <p:cNvPr id="2" name="Rectangle 1"/>
@@ -8636,6 +9042,35 @@
         <p:nvPr/>
       </p:nvGrpSpPr>
       <p:grpSpPr/>
+      <p:sp xmlns:a="http://schemas.openxmlformats.org/drawingml/2006/main" xmlns:p="http://schemas.openxmlformats.org/presentationml/2006/main">
+        <p:nvSpPr>
+          <p:cNvPr id="9900" name="_BG_DARK_"/>
+          <p:cNvSpPr>
+            <a:spLocks noSelect="1" noMove="1" noResize="1"/>
+          </p:cNvSpPr>
+          <p:nvPr/>
+        </p:nvSpPr>
+        <p:spPr>
+          <a:xfrm>
+            <a:off x="0" y="0"/>
+            <a:ext cx="9144000" cy="5143500"/>
+          </a:xfrm>
+          <a:prstGeom prst="rect">
+            <a:avLst/>
+          </a:prstGeom>
+          <a:solidFill>
+            <a:srgbClr val="1C1C1C"/>
+          </a:solidFill>
+          <a:ln>
+            <a:noFill/>
+          </a:ln>
+        </p:spPr>
+        <p:txBody>
+          <a:bodyPr/>
+          <a:lstStyle/>
+          <a:p/>
+        </p:txBody>
+      </p:sp>
       <p:sp>
         <p:nvSpPr>
           <p:cNvPr id="2" name="Rectangle 1"/>
@@ -9083,6 +9518,35 @@
         <p:nvPr/>
       </p:nvGrpSpPr>
       <p:grpSpPr/>
+      <p:sp xmlns:a="http://schemas.openxmlformats.org/drawingml/2006/main" xmlns:p="http://schemas.openxmlformats.org/presentationml/2006/main">
+        <p:nvSpPr>
+          <p:cNvPr id="9900" name="_BG_DARK_"/>
+          <p:cNvSpPr>
+            <a:spLocks noSelect="1" noMove="1" noResize="1"/>
+          </p:cNvSpPr>
+          <p:nvPr/>
+        </p:nvSpPr>
+        <p:spPr>
+          <a:xfrm>
+            <a:off x="0" y="0"/>
+            <a:ext cx="9144000" cy="5143500"/>
+          </a:xfrm>
+          <a:prstGeom prst="rect">
+            <a:avLst/>
+          </a:prstGeom>
+          <a:solidFill>
+            <a:srgbClr val="1C1C1C"/>
+          </a:solidFill>
+          <a:ln>
+            <a:noFill/>
+          </a:ln>
+        </p:spPr>
+        <p:txBody>
+          <a:bodyPr/>
+          <a:lstStyle/>
+          <a:p/>
+        </p:txBody>
+      </p:sp>
       <p:sp>
         <p:nvSpPr>
           <p:cNvPr id="2" name="Rectangle 1"/>

--- a/00-01_han-ai/training-materials/course03_jissen_gazo.pptx
+++ b/00-01_han-ai/training-materials/course03_jissen_gazo.pptx
@@ -3202,12 +3202,10 @@
         <p:nvPr/>
       </p:nvGrpSpPr>
       <p:grpSpPr/>
-      <p:sp xmlns:a="http://schemas.openxmlformats.org/drawingml/2006/main" xmlns:p="http://schemas.openxmlformats.org/presentationml/2006/main">
+      <p:sp>
         <p:nvSpPr>
           <p:cNvPr id="9900" name="_BG_DARK_"/>
-          <p:cNvSpPr>
-            <a:spLocks noSelect="1" noMove="1" noResize="1"/>
-          </p:cNvSpPr>
+          <p:cNvSpPr/>
           <p:nvPr/>
         </p:nvSpPr>
         <p:spPr>
@@ -3225,6 +3223,20 @@
             <a:noFill/>
           </a:ln>
         </p:spPr>
+        <p:style>
+          <a:lnRef idx="1">
+            <a:srgbClr val="1C1C1C"/>
+          </a:lnRef>
+          <a:fillRef idx="1">
+            <a:srgbClr val="1C1C1C"/>
+          </a:fillRef>
+          <a:effectRef idx="0">
+            <a:srgbClr val="1C1C1C"/>
+          </a:effectRef>
+          <a:fontRef idx="minor">
+            <a:srgbClr val="EEEEEE"/>
+          </a:fontRef>
+        </p:style>
         <p:txBody>
           <a:bodyPr/>
           <a:lstStyle/>
@@ -3470,12 +3482,10 @@
         <p:nvPr/>
       </p:nvGrpSpPr>
       <p:grpSpPr/>
-      <p:sp xmlns:a="http://schemas.openxmlformats.org/drawingml/2006/main" xmlns:p="http://schemas.openxmlformats.org/presentationml/2006/main">
+      <p:sp>
         <p:nvSpPr>
           <p:cNvPr id="9900" name="_BG_DARK_"/>
-          <p:cNvSpPr>
-            <a:spLocks noSelect="1" noMove="1" noResize="1"/>
-          </p:cNvSpPr>
+          <p:cNvSpPr/>
           <p:nvPr/>
         </p:nvSpPr>
         <p:spPr>
@@ -3493,6 +3503,20 @@
             <a:noFill/>
           </a:ln>
         </p:spPr>
+        <p:style>
+          <a:lnRef idx="1">
+            <a:srgbClr val="1C1C1C"/>
+          </a:lnRef>
+          <a:fillRef idx="1">
+            <a:srgbClr val="1C1C1C"/>
+          </a:fillRef>
+          <a:effectRef idx="0">
+            <a:srgbClr val="1C1C1C"/>
+          </a:effectRef>
+          <a:fontRef idx="minor">
+            <a:srgbClr val="EEEEEE"/>
+          </a:fontRef>
+        </p:style>
         <p:txBody>
           <a:bodyPr/>
           <a:lstStyle/>
@@ -3989,12 +4013,10 @@
         <p:nvPr/>
       </p:nvGrpSpPr>
       <p:grpSpPr/>
-      <p:sp xmlns:a="http://schemas.openxmlformats.org/drawingml/2006/main" xmlns:p="http://schemas.openxmlformats.org/presentationml/2006/main">
+      <p:sp>
         <p:nvSpPr>
           <p:cNvPr id="9900" name="_BG_DARK_"/>
-          <p:cNvSpPr>
-            <a:spLocks noSelect="1" noMove="1" noResize="1"/>
-          </p:cNvSpPr>
+          <p:cNvSpPr/>
           <p:nvPr/>
         </p:nvSpPr>
         <p:spPr>
@@ -4012,6 +4034,20 @@
             <a:noFill/>
           </a:ln>
         </p:spPr>
+        <p:style>
+          <a:lnRef idx="1">
+            <a:srgbClr val="1C1C1C"/>
+          </a:lnRef>
+          <a:fillRef idx="1">
+            <a:srgbClr val="1C1C1C"/>
+          </a:fillRef>
+          <a:effectRef idx="0">
+            <a:srgbClr val="1C1C1C"/>
+          </a:effectRef>
+          <a:fontRef idx="minor">
+            <a:srgbClr val="EEEEEE"/>
+          </a:fontRef>
+        </p:style>
         <p:txBody>
           <a:bodyPr/>
           <a:lstStyle/>
@@ -4519,12 +4555,10 @@
         <p:nvPr/>
       </p:nvGrpSpPr>
       <p:grpSpPr/>
-      <p:sp xmlns:a="http://schemas.openxmlformats.org/drawingml/2006/main" xmlns:p="http://schemas.openxmlformats.org/presentationml/2006/main">
+      <p:sp>
         <p:nvSpPr>
           <p:cNvPr id="9900" name="_BG_DARK_"/>
-          <p:cNvSpPr>
-            <a:spLocks noSelect="1" noMove="1" noResize="1"/>
-          </p:cNvSpPr>
+          <p:cNvSpPr/>
           <p:nvPr/>
         </p:nvSpPr>
         <p:spPr>
@@ -4542,6 +4576,20 @@
             <a:noFill/>
           </a:ln>
         </p:spPr>
+        <p:style>
+          <a:lnRef idx="1">
+            <a:srgbClr val="1C1C1C"/>
+          </a:lnRef>
+          <a:fillRef idx="1">
+            <a:srgbClr val="1C1C1C"/>
+          </a:fillRef>
+          <a:effectRef idx="0">
+            <a:srgbClr val="1C1C1C"/>
+          </a:effectRef>
+          <a:fontRef idx="minor">
+            <a:srgbClr val="EEEEEE"/>
+          </a:fontRef>
+        </p:style>
         <p:txBody>
           <a:bodyPr/>
           <a:lstStyle/>
@@ -4642,12 +4690,10 @@
         <p:nvPr/>
       </p:nvGrpSpPr>
       <p:grpSpPr/>
-      <p:sp xmlns:a="http://schemas.openxmlformats.org/drawingml/2006/main" xmlns:p="http://schemas.openxmlformats.org/presentationml/2006/main">
+      <p:sp>
         <p:nvSpPr>
           <p:cNvPr id="9900" name="_BG_DARK_"/>
-          <p:cNvSpPr>
-            <a:spLocks noSelect="1" noMove="1" noResize="1"/>
-          </p:cNvSpPr>
+          <p:cNvSpPr/>
           <p:nvPr/>
         </p:nvSpPr>
         <p:spPr>
@@ -4665,6 +4711,20 @@
             <a:noFill/>
           </a:ln>
         </p:spPr>
+        <p:style>
+          <a:lnRef idx="1">
+            <a:srgbClr val="1C1C1C"/>
+          </a:lnRef>
+          <a:fillRef idx="1">
+            <a:srgbClr val="1C1C1C"/>
+          </a:fillRef>
+          <a:effectRef idx="0">
+            <a:srgbClr val="1C1C1C"/>
+          </a:effectRef>
+          <a:fontRef idx="minor">
+            <a:srgbClr val="EEEEEE"/>
+          </a:fontRef>
+        </p:style>
         <p:txBody>
           <a:bodyPr/>
           <a:lstStyle/>
@@ -4876,12 +4936,10 @@
         <p:nvPr/>
       </p:nvGrpSpPr>
       <p:grpSpPr/>
-      <p:sp xmlns:a="http://schemas.openxmlformats.org/drawingml/2006/main" xmlns:p="http://schemas.openxmlformats.org/presentationml/2006/main">
+      <p:sp>
         <p:nvSpPr>
           <p:cNvPr id="9900" name="_BG_DARK_"/>
-          <p:cNvSpPr>
-            <a:spLocks noSelect="1" noMove="1" noResize="1"/>
-          </p:cNvSpPr>
+          <p:cNvSpPr/>
           <p:nvPr/>
         </p:nvSpPr>
         <p:spPr>
@@ -4899,6 +4957,20 @@
             <a:noFill/>
           </a:ln>
         </p:spPr>
+        <p:style>
+          <a:lnRef idx="1">
+            <a:srgbClr val="1C1C1C"/>
+          </a:lnRef>
+          <a:fillRef idx="1">
+            <a:srgbClr val="1C1C1C"/>
+          </a:fillRef>
+          <a:effectRef idx="0">
+            <a:srgbClr val="1C1C1C"/>
+          </a:effectRef>
+          <a:fontRef idx="minor">
+            <a:srgbClr val="EEEEEE"/>
+          </a:fontRef>
+        </p:style>
         <p:txBody>
           <a:bodyPr/>
           <a:lstStyle/>
@@ -5662,12 +5734,10 @@
         <p:nvPr/>
       </p:nvGrpSpPr>
       <p:grpSpPr/>
-      <p:sp xmlns:a="http://schemas.openxmlformats.org/drawingml/2006/main" xmlns:p="http://schemas.openxmlformats.org/presentationml/2006/main">
+      <p:sp>
         <p:nvSpPr>
           <p:cNvPr id="9900" name="_BG_DARK_"/>
-          <p:cNvSpPr>
-            <a:spLocks noSelect="1" noMove="1" noResize="1"/>
-          </p:cNvSpPr>
+          <p:cNvSpPr/>
           <p:nvPr/>
         </p:nvSpPr>
         <p:spPr>
@@ -5685,6 +5755,20 @@
             <a:noFill/>
           </a:ln>
         </p:spPr>
+        <p:style>
+          <a:lnRef idx="1">
+            <a:srgbClr val="1C1C1C"/>
+          </a:lnRef>
+          <a:fillRef idx="1">
+            <a:srgbClr val="1C1C1C"/>
+          </a:fillRef>
+          <a:effectRef idx="0">
+            <a:srgbClr val="1C1C1C"/>
+          </a:effectRef>
+          <a:fontRef idx="minor">
+            <a:srgbClr val="EEEEEE"/>
+          </a:fontRef>
+        </p:style>
         <p:txBody>
           <a:bodyPr/>
           <a:lstStyle/>
@@ -5896,12 +5980,10 @@
         <p:nvPr/>
       </p:nvGrpSpPr>
       <p:grpSpPr/>
-      <p:sp xmlns:a="http://schemas.openxmlformats.org/drawingml/2006/main" xmlns:p="http://schemas.openxmlformats.org/presentationml/2006/main">
+      <p:sp>
         <p:nvSpPr>
           <p:cNvPr id="9900" name="_BG_DARK_"/>
-          <p:cNvSpPr>
-            <a:spLocks noSelect="1" noMove="1" noResize="1"/>
-          </p:cNvSpPr>
+          <p:cNvSpPr/>
           <p:nvPr/>
         </p:nvSpPr>
         <p:spPr>
@@ -5919,6 +6001,20 @@
             <a:noFill/>
           </a:ln>
         </p:spPr>
+        <p:style>
+          <a:lnRef idx="1">
+            <a:srgbClr val="1C1C1C"/>
+          </a:lnRef>
+          <a:fillRef idx="1">
+            <a:srgbClr val="1C1C1C"/>
+          </a:fillRef>
+          <a:effectRef idx="0">
+            <a:srgbClr val="1C1C1C"/>
+          </a:effectRef>
+          <a:fontRef idx="minor">
+            <a:srgbClr val="EEEEEE"/>
+          </a:fontRef>
+        </p:style>
         <p:txBody>
           <a:bodyPr/>
           <a:lstStyle/>
@@ -6415,12 +6511,10 @@
         <p:nvPr/>
       </p:nvGrpSpPr>
       <p:grpSpPr/>
-      <p:sp xmlns:a="http://schemas.openxmlformats.org/drawingml/2006/main" xmlns:p="http://schemas.openxmlformats.org/presentationml/2006/main">
+      <p:sp>
         <p:nvSpPr>
           <p:cNvPr id="9900" name="_BG_DARK_"/>
-          <p:cNvSpPr>
-            <a:spLocks noSelect="1" noMove="1" noResize="1"/>
-          </p:cNvSpPr>
+          <p:cNvSpPr/>
           <p:nvPr/>
         </p:nvSpPr>
         <p:spPr>
@@ -6438,6 +6532,20 @@
             <a:noFill/>
           </a:ln>
         </p:spPr>
+        <p:style>
+          <a:lnRef idx="1">
+            <a:srgbClr val="1C1C1C"/>
+          </a:lnRef>
+          <a:fillRef idx="1">
+            <a:srgbClr val="1C1C1C"/>
+          </a:fillRef>
+          <a:effectRef idx="0">
+            <a:srgbClr val="1C1C1C"/>
+          </a:effectRef>
+          <a:fontRef idx="minor">
+            <a:srgbClr val="EEEEEE"/>
+          </a:fontRef>
+        </p:style>
         <p:txBody>
           <a:bodyPr/>
           <a:lstStyle/>
@@ -7155,12 +7263,10 @@
         <p:nvPr/>
       </p:nvGrpSpPr>
       <p:grpSpPr/>
-      <p:sp xmlns:a="http://schemas.openxmlformats.org/drawingml/2006/main" xmlns:p="http://schemas.openxmlformats.org/presentationml/2006/main">
+      <p:sp>
         <p:nvSpPr>
           <p:cNvPr id="9900" name="_BG_DARK_"/>
-          <p:cNvSpPr>
-            <a:spLocks noSelect="1" noMove="1" noResize="1"/>
-          </p:cNvSpPr>
+          <p:cNvSpPr/>
           <p:nvPr/>
         </p:nvSpPr>
         <p:spPr>
@@ -7178,6 +7284,20 @@
             <a:noFill/>
           </a:ln>
         </p:spPr>
+        <p:style>
+          <a:lnRef idx="1">
+            <a:srgbClr val="1C1C1C"/>
+          </a:lnRef>
+          <a:fillRef idx="1">
+            <a:srgbClr val="1C1C1C"/>
+          </a:fillRef>
+          <a:effectRef idx="0">
+            <a:srgbClr val="1C1C1C"/>
+          </a:effectRef>
+          <a:fontRef idx="minor">
+            <a:srgbClr val="EEEEEE"/>
+          </a:fontRef>
+        </p:style>
         <p:txBody>
           <a:bodyPr/>
           <a:lstStyle/>
@@ -7389,12 +7509,10 @@
         <p:nvPr/>
       </p:nvGrpSpPr>
       <p:grpSpPr/>
-      <p:sp xmlns:a="http://schemas.openxmlformats.org/drawingml/2006/main" xmlns:p="http://schemas.openxmlformats.org/presentationml/2006/main">
+      <p:sp>
         <p:nvSpPr>
           <p:cNvPr id="9900" name="_BG_DARK_"/>
-          <p:cNvSpPr>
-            <a:spLocks noSelect="1" noMove="1" noResize="1"/>
-          </p:cNvSpPr>
+          <p:cNvSpPr/>
           <p:nvPr/>
         </p:nvSpPr>
         <p:spPr>
@@ -7412,6 +7530,20 @@
             <a:noFill/>
           </a:ln>
         </p:spPr>
+        <p:style>
+          <a:lnRef idx="1">
+            <a:srgbClr val="1C1C1C"/>
+          </a:lnRef>
+          <a:fillRef idx="1">
+            <a:srgbClr val="1C1C1C"/>
+          </a:fillRef>
+          <a:effectRef idx="0">
+            <a:srgbClr val="1C1C1C"/>
+          </a:effectRef>
+          <a:fontRef idx="minor">
+            <a:srgbClr val="EEEEEE"/>
+          </a:fontRef>
+        </p:style>
         <p:txBody>
           <a:bodyPr/>
           <a:lstStyle/>
@@ -7827,12 +7959,10 @@
         <p:nvPr/>
       </p:nvGrpSpPr>
       <p:grpSpPr/>
-      <p:sp xmlns:a="http://schemas.openxmlformats.org/drawingml/2006/main" xmlns:p="http://schemas.openxmlformats.org/presentationml/2006/main">
+      <p:sp>
         <p:nvSpPr>
           <p:cNvPr id="9900" name="_BG_DARK_"/>
-          <p:cNvSpPr>
-            <a:spLocks noSelect="1" noMove="1" noResize="1"/>
-          </p:cNvSpPr>
+          <p:cNvSpPr/>
           <p:nvPr/>
         </p:nvSpPr>
         <p:spPr>
@@ -7850,6 +7980,20 @@
             <a:noFill/>
           </a:ln>
         </p:spPr>
+        <p:style>
+          <a:lnRef idx="1">
+            <a:srgbClr val="1C1C1C"/>
+          </a:lnRef>
+          <a:fillRef idx="1">
+            <a:srgbClr val="1C1C1C"/>
+          </a:fillRef>
+          <a:effectRef idx="0">
+            <a:srgbClr val="1C1C1C"/>
+          </a:effectRef>
+          <a:fontRef idx="minor">
+            <a:srgbClr val="EEEEEE"/>
+          </a:fontRef>
+        </p:style>
         <p:txBody>
           <a:bodyPr/>
           <a:lstStyle/>
@@ -8190,12 +8334,10 @@
         <p:nvPr/>
       </p:nvGrpSpPr>
       <p:grpSpPr/>
-      <p:sp xmlns:a="http://schemas.openxmlformats.org/drawingml/2006/main" xmlns:p="http://schemas.openxmlformats.org/presentationml/2006/main">
+      <p:sp>
         <p:nvSpPr>
           <p:cNvPr id="9900" name="_BG_DARK_"/>
-          <p:cNvSpPr>
-            <a:spLocks noSelect="1" noMove="1" noResize="1"/>
-          </p:cNvSpPr>
+          <p:cNvSpPr/>
           <p:nvPr/>
         </p:nvSpPr>
         <p:spPr>
@@ -8213,6 +8355,20 @@
             <a:noFill/>
           </a:ln>
         </p:spPr>
+        <p:style>
+          <a:lnRef idx="1">
+            <a:srgbClr val="1C1C1C"/>
+          </a:lnRef>
+          <a:fillRef idx="1">
+            <a:srgbClr val="1C1C1C"/>
+          </a:fillRef>
+          <a:effectRef idx="0">
+            <a:srgbClr val="1C1C1C"/>
+          </a:effectRef>
+          <a:fontRef idx="minor">
+            <a:srgbClr val="EEEEEE"/>
+          </a:fontRef>
+        </p:style>
         <p:txBody>
           <a:bodyPr/>
           <a:lstStyle/>
@@ -8424,12 +8580,10 @@
         <p:nvPr/>
       </p:nvGrpSpPr>
       <p:grpSpPr/>
-      <p:sp xmlns:a="http://schemas.openxmlformats.org/drawingml/2006/main" xmlns:p="http://schemas.openxmlformats.org/presentationml/2006/main">
+      <p:sp>
         <p:nvSpPr>
           <p:cNvPr id="9900" name="_BG_DARK_"/>
-          <p:cNvSpPr>
-            <a:spLocks noSelect="1" noMove="1" noResize="1"/>
-          </p:cNvSpPr>
+          <p:cNvSpPr/>
           <p:nvPr/>
         </p:nvSpPr>
         <p:spPr>
@@ -8447,6 +8601,20 @@
             <a:noFill/>
           </a:ln>
         </p:spPr>
+        <p:style>
+          <a:lnRef idx="1">
+            <a:srgbClr val="1C1C1C"/>
+          </a:lnRef>
+          <a:fillRef idx="1">
+            <a:srgbClr val="1C1C1C"/>
+          </a:fillRef>
+          <a:effectRef idx="0">
+            <a:srgbClr val="1C1C1C"/>
+          </a:effectRef>
+          <a:fontRef idx="minor">
+            <a:srgbClr val="EEEEEE"/>
+          </a:fontRef>
+        </p:style>
         <p:txBody>
           <a:bodyPr/>
           <a:lstStyle/>
@@ -9042,12 +9210,10 @@
         <p:nvPr/>
       </p:nvGrpSpPr>
       <p:grpSpPr/>
-      <p:sp xmlns:a="http://schemas.openxmlformats.org/drawingml/2006/main" xmlns:p="http://schemas.openxmlformats.org/presentationml/2006/main">
+      <p:sp>
         <p:nvSpPr>
           <p:cNvPr id="9900" name="_BG_DARK_"/>
-          <p:cNvSpPr>
-            <a:spLocks noSelect="1" noMove="1" noResize="1"/>
-          </p:cNvSpPr>
+          <p:cNvSpPr/>
           <p:nvPr/>
         </p:nvSpPr>
         <p:spPr>
@@ -9065,6 +9231,20 @@
             <a:noFill/>
           </a:ln>
         </p:spPr>
+        <p:style>
+          <a:lnRef idx="1">
+            <a:srgbClr val="1C1C1C"/>
+          </a:lnRef>
+          <a:fillRef idx="1">
+            <a:srgbClr val="1C1C1C"/>
+          </a:fillRef>
+          <a:effectRef idx="0">
+            <a:srgbClr val="1C1C1C"/>
+          </a:effectRef>
+          <a:fontRef idx="minor">
+            <a:srgbClr val="EEEEEE"/>
+          </a:fontRef>
+        </p:style>
         <p:txBody>
           <a:bodyPr/>
           <a:lstStyle/>
@@ -9518,12 +9698,10 @@
         <p:nvPr/>
       </p:nvGrpSpPr>
       <p:grpSpPr/>
-      <p:sp xmlns:a="http://schemas.openxmlformats.org/drawingml/2006/main" xmlns:p="http://schemas.openxmlformats.org/presentationml/2006/main">
+      <p:sp>
         <p:nvSpPr>
           <p:cNvPr id="9900" name="_BG_DARK_"/>
-          <p:cNvSpPr>
-            <a:spLocks noSelect="1" noMove="1" noResize="1"/>
-          </p:cNvSpPr>
+          <p:cNvSpPr/>
           <p:nvPr/>
         </p:nvSpPr>
         <p:spPr>
@@ -9541,6 +9719,20 @@
             <a:noFill/>
           </a:ln>
         </p:spPr>
+        <p:style>
+          <a:lnRef idx="1">
+            <a:srgbClr val="1C1C1C"/>
+          </a:lnRef>
+          <a:fillRef idx="1">
+            <a:srgbClr val="1C1C1C"/>
+          </a:fillRef>
+          <a:effectRef idx="0">
+            <a:srgbClr val="1C1C1C"/>
+          </a:effectRef>
+          <a:fontRef idx="minor">
+            <a:srgbClr val="EEEEEE"/>
+          </a:fontRef>
+        </p:style>
         <p:txBody>
           <a:bodyPr/>
           <a:lstStyle/>

--- a/00-01_han-ai/training-materials/course03_jissen_gazo.pptx
+++ b/00-01_han-ai/training-materials/course03_jissen_gazo.pptx
@@ -6790,7 +6790,7 @@
                             <a:srgbClr val="EEEEEE"/>
                           </a:solidFill>
                         </a:rPr>
-                        <a:t>Canvaログイン確認・基本画面の説明</a:t>
+                        <a:t>Canvaログイン確認・基本画面・「テンプレート」の意味の整理</a:t>
                       </a:r>
                     </a:p>
                   </a:txBody>
@@ -6808,7 +6808,7 @@
                             <a:srgbClr val="EEEEEE"/>
                           </a:solidFill>
                         </a:rPr>
-                        <a:t>10分</a:t>
+                        <a:t>13分</a:t>
                       </a:r>
                     </a:p>
                   </a:txBody>
@@ -7222,7 +7222,7 @@
                             <a:srgbClr val="EEEEEE"/>
                           </a:solidFill>
                         </a:rPr>
-                        <a:t>10分</a:t>
+                        <a:t>4分</a:t>
                       </a:r>
                     </a:p>
                   </a:txBody>

--- a/00-01_han-ai/training-materials/course03_jissen_gazo.pptx
+++ b/00-01_han-ai/training-materials/course03_jissen_gazo.pptx
@@ -5208,7 +5208,7 @@
                             <a:srgbClr val="EEEEEE"/>
                           </a:solidFill>
                         </a:rPr>
-                        <a:t>「デザインを作成」→「A4チラシ」（または任意のサイズ）を選択</a:t>
+                        <a:t>Canvaトップで「チラシ」と検索 → Magic Designに作りたい内容を日本語で入力</a:t>
                       </a:r>
                     </a:p>
                   </a:txBody>
@@ -5268,7 +5268,7 @@
                             <a:srgbClr val="EEEEEE"/>
                           </a:solidFill>
                         </a:rPr>
-                        <a:t>テンプレートを選択（業種・用途で絞り込み）</a:t>
+                        <a:t>生成されたデザイン案から気に入ったものを選択</a:t>
                       </a:r>
                     </a:p>
                   </a:txBody>
